--- a/Project_Presentation.pptx
+++ b/Project_Presentation.pptx
@@ -28,7 +28,13 @@
     <p:sldId id="276" r:id="rId22"/>
     <p:sldId id="277" r:id="rId23"/>
     <p:sldId id="278" r:id="rId24"/>
-    <p:sldId id="279" r:id="rId25"/>
+    <p:sldId id="280" r:id="rId25"/>
+    <p:sldId id="281" r:id="rId26"/>
+    <p:sldId id="282" r:id="rId27"/>
+    <p:sldId id="283" r:id="rId28"/>
+    <p:sldId id="284" r:id="rId29"/>
+    <p:sldId id="285" r:id="rId30"/>
+    <p:sldId id="279" r:id="rId31"/>
   </p:sldIdLst>
   <p:sldSz cx="12192000" cy="6858000"/>
   <p:notesSz cx="6858000" cy="9144000"/>
@@ -127,6 +133,11 @@
       </a:defRPr>
     </a:lvl9pPr>
   </p:defaultTextStyle>
+  <p:extLst>
+    <p:ext uri="{EFAFB233-063F-42B5-8137-9DF3F51BA10A}">
+      <p15:sldGuideLst xmlns:p15="http://schemas.microsoft.com/office/powerpoint/2012/main"/>
+    </p:ext>
+  </p:extLst>
 </p:presentation>
 </file>
 
@@ -853,7 +864,7 @@
             <a:fld id="{B61BEF0D-F0BB-DE4B-95CE-6DB70DBA9567}" type="datetimeFigureOut">
               <a:rPr lang="en-US" dirty="0"/>
               <a:pPr/>
-              <a:t>9/25/2026</a:t>
+              <a:t>10/6/2026</a:t>
             </a:fld>
             <a:endParaRPr lang="en-US" dirty="0"/>
           </a:p>
@@ -1101,7 +1112,7 @@
             <a:fld id="{B61BEF0D-F0BB-DE4B-95CE-6DB70DBA9567}" type="datetimeFigureOut">
               <a:rPr lang="en-US" dirty="0"/>
               <a:pPr/>
-              <a:t>9/25/2026</a:t>
+              <a:t>10/6/2026</a:t>
             </a:fld>
             <a:endParaRPr lang="en-US" dirty="0"/>
           </a:p>
@@ -1412,7 +1423,7 @@
             <a:fld id="{B61BEF0D-F0BB-DE4B-95CE-6DB70DBA9567}" type="datetimeFigureOut">
               <a:rPr lang="en-US" dirty="0"/>
               <a:pPr/>
-              <a:t>9/25/2026</a:t>
+              <a:t>10/6/2026</a:t>
             </a:fld>
             <a:endParaRPr lang="en-US" dirty="0"/>
           </a:p>
@@ -1750,7 +1761,7 @@
             <a:fld id="{B61BEF0D-F0BB-DE4B-95CE-6DB70DBA9567}" type="datetimeFigureOut">
               <a:rPr lang="en-US" dirty="0"/>
               <a:pPr/>
-              <a:t>9/25/2026</a:t>
+              <a:t>10/6/2026</a:t>
             </a:fld>
             <a:endParaRPr lang="en-US" dirty="0"/>
           </a:p>
@@ -2061,7 +2072,7 @@
             <a:fld id="{B61BEF0D-F0BB-DE4B-95CE-6DB70DBA9567}" type="datetimeFigureOut">
               <a:rPr lang="en-US" dirty="0"/>
               <a:pPr/>
-              <a:t>9/25/2026</a:t>
+              <a:t>10/6/2026</a:t>
             </a:fld>
             <a:endParaRPr lang="en-US" dirty="0"/>
           </a:p>
@@ -2451,7 +2462,7 @@
             <a:fld id="{B61BEF0D-F0BB-DE4B-95CE-6DB70DBA9567}" type="datetimeFigureOut">
               <a:rPr lang="en-US" dirty="0"/>
               <a:pPr/>
-              <a:t>9/25/2026</a:t>
+              <a:t>10/6/2026</a:t>
             </a:fld>
             <a:endParaRPr lang="en-US" dirty="0"/>
           </a:p>
@@ -2617,7 +2628,7 @@
           <a:p>
             <a:fld id="{55C6B4A9-1611-4792-9094-5F34BCA07E0B}" type="datetimeFigureOut">
               <a:rPr lang="en-US" dirty="0"/>
-              <a:t>9/25/2026</a:t>
+              <a:t>10/6/2026</a:t>
             </a:fld>
             <a:endParaRPr lang="en-US" dirty="0"/>
           </a:p>
@@ -2793,7 +2804,7 @@
             <a:fld id="{B61BEF0D-F0BB-DE4B-95CE-6DB70DBA9567}" type="datetimeFigureOut">
               <a:rPr lang="en-US" dirty="0"/>
               <a:pPr/>
-              <a:t>9/25/2026</a:t>
+              <a:t>10/6/2026</a:t>
             </a:fld>
             <a:endParaRPr lang="en-US" dirty="0"/>
           </a:p>
@@ -2966,7 +2977,7 @@
             <a:fld id="{B61BEF0D-F0BB-DE4B-95CE-6DB70DBA9567}" type="datetimeFigureOut">
               <a:rPr lang="en-US" dirty="0"/>
               <a:pPr/>
-              <a:t>9/25/2026</a:t>
+              <a:t>10/6/2026</a:t>
             </a:fld>
             <a:endParaRPr lang="en-US" dirty="0"/>
           </a:p>
@@ -3210,7 +3221,7 @@
             <a:fld id="{B61BEF0D-F0BB-DE4B-95CE-6DB70DBA9567}" type="datetimeFigureOut">
               <a:rPr lang="en-US" dirty="0"/>
               <a:pPr/>
-              <a:t>9/25/2026</a:t>
+              <a:t>10/6/2026</a:t>
             </a:fld>
             <a:endParaRPr lang="en-US" dirty="0"/>
           </a:p>
@@ -3438,7 +3449,7 @@
           <a:p>
             <a:fld id="{EB712588-04B1-427B-82EE-E8DB90309F08}" type="datetimeFigureOut">
               <a:rPr lang="en-US" dirty="0"/>
-              <a:t>9/25/2026</a:t>
+              <a:t>10/6/2026</a:t>
             </a:fld>
             <a:endParaRPr lang="en-US" dirty="0"/>
           </a:p>
@@ -3808,7 +3819,7 @@
             <a:fld id="{B61BEF0D-F0BB-DE4B-95CE-6DB70DBA9567}" type="datetimeFigureOut">
               <a:rPr lang="en-US" dirty="0"/>
               <a:pPr/>
-              <a:t>9/25/2026</a:t>
+              <a:t>10/6/2026</a:t>
             </a:fld>
             <a:endParaRPr lang="en-US" dirty="0"/>
           </a:p>
@@ -3928,7 +3939,7 @@
             <a:fld id="{B61BEF0D-F0BB-DE4B-95CE-6DB70DBA9567}" type="datetimeFigureOut">
               <a:rPr lang="en-US" dirty="0"/>
               <a:pPr/>
-              <a:t>9/25/2026</a:t>
+              <a:t>10/6/2026</a:t>
             </a:fld>
             <a:endParaRPr lang="en-US" dirty="0"/>
           </a:p>
@@ -4020,7 +4031,7 @@
             <a:fld id="{B61BEF0D-F0BB-DE4B-95CE-6DB70DBA9567}" type="datetimeFigureOut">
               <a:rPr lang="en-US" dirty="0"/>
               <a:pPr/>
-              <a:t>9/25/2026</a:t>
+              <a:t>10/6/2026</a:t>
             </a:fld>
             <a:endParaRPr lang="en-US" dirty="0"/>
           </a:p>
@@ -4271,7 +4282,7 @@
           <a:p>
             <a:fld id="{42A54C80-263E-416B-A8E0-580EDEADCBDC}" type="datetimeFigureOut">
               <a:rPr lang="en-US" dirty="0"/>
-              <a:t>9/25/2026</a:t>
+              <a:t>10/6/2026</a:t>
             </a:fld>
             <a:endParaRPr lang="en-US" dirty="0"/>
           </a:p>
@@ -4530,7 +4541,7 @@
             <a:fld id="{B61BEF0D-F0BB-DE4B-95CE-6DB70DBA9567}" type="datetimeFigureOut">
               <a:rPr lang="en-US" dirty="0"/>
               <a:pPr/>
-              <a:t>9/25/2026</a:t>
+              <a:t>10/6/2026</a:t>
             </a:fld>
             <a:endParaRPr lang="en-US" dirty="0"/>
           </a:p>
@@ -5270,7 +5281,7 @@
             <a:fld id="{B61BEF0D-F0BB-DE4B-95CE-6DB70DBA9567}" type="datetimeFigureOut">
               <a:rPr lang="en-US" dirty="0"/>
               <a:pPr/>
-              <a:t>9/25/2026</a:t>
+              <a:t>10/6/2026</a:t>
             </a:fld>
             <a:endParaRPr lang="en-US" dirty="0"/>
           </a:p>
@@ -5808,7 +5819,7 @@
         </p:nvSpPr>
         <p:spPr>
           <a:xfrm>
-            <a:off x="1507067" y="1743075"/>
+            <a:off x="1173692" y="447675"/>
             <a:ext cx="7766936" cy="1685925"/>
           </a:xfrm>
         </p:spPr>
@@ -5842,7 +5853,7 @@
         </p:nvSpPr>
         <p:spPr>
           <a:xfrm>
-            <a:off x="1507067" y="4050833"/>
+            <a:off x="1335617" y="3288833"/>
             <a:ext cx="7766936" cy="1807042"/>
           </a:xfrm>
         </p:spPr>
@@ -9145,6 +9156,10 @@
           </p:nvPr>
         </p:nvSpPr>
         <p:spPr bwMode="auto">
+          <a:xfrm>
+            <a:off x="677334" y="2392815"/>
+            <a:ext cx="2723887" cy="3416320"/>
+          </a:xfrm>
           <a:prstGeom prst="rect">
             <a:avLst/>
           </a:prstGeom>
@@ -9207,7 +9222,7 @@
               <a:buNone/>
               <a:tabLst/>
             </a:pPr>
-            <a:endParaRPr kumimoji="0" lang="en-US" altLang="en-US" sz="1800" b="0" i="0" u="none" strike="noStrike" cap="none" normalizeH="0" baseline="0">
+            <a:endParaRPr kumimoji="0" lang="en-US" altLang="en-US" sz="1800" b="0" i="0" u="none" strike="noStrike" cap="none" normalizeH="0" baseline="0" dirty="0">
               <a:ln>
                 <a:noFill/>
               </a:ln>
@@ -9236,7 +9251,7 @@
               <a:tabLst/>
             </a:pPr>
             <a:r>
-              <a:rPr kumimoji="0" lang="en-US" altLang="en-US" sz="1800" b="0" i="0" u="none" strike="noStrike" cap="none" normalizeH="0" baseline="0">
+              <a:rPr kumimoji="0" lang="en-US" altLang="en-US" sz="1800" b="0" i="0" u="none" strike="noStrike" cap="none" normalizeH="0" baseline="0" dirty="0">
                 <a:ln>
                   <a:noFill/>
                 </a:ln>
@@ -9267,7 +9282,7 @@
               <a:tabLst/>
             </a:pPr>
             <a:r>
-              <a:rPr kumimoji="0" lang="en-US" altLang="en-US" sz="1800" b="0" i="0" u="none" strike="noStrike" cap="none" normalizeH="0" baseline="0">
+              <a:rPr kumimoji="0" lang="en-US" altLang="en-US" sz="1800" b="0" i="0" u="none" strike="noStrike" cap="none" normalizeH="0" baseline="0" dirty="0">
                 <a:ln>
                   <a:noFill/>
                 </a:ln>
@@ -9298,7 +9313,7 @@
               <a:tabLst/>
             </a:pPr>
             <a:r>
-              <a:rPr kumimoji="0" lang="en-US" altLang="en-US" sz="1800" b="0" i="0" u="none" strike="noStrike" cap="none" normalizeH="0" baseline="0">
+              <a:rPr kumimoji="0" lang="en-US" altLang="en-US" sz="1800" b="0" i="0" u="none" strike="noStrike" cap="none" normalizeH="0" baseline="0" dirty="0">
                 <a:ln>
                   <a:noFill/>
                 </a:ln>
@@ -9329,7 +9344,7 @@
               <a:tabLst/>
             </a:pPr>
             <a:r>
-              <a:rPr kumimoji="0" lang="en-US" altLang="en-US" sz="1800" b="0" i="0" u="none" strike="noStrike" cap="none" normalizeH="0" baseline="0">
+              <a:rPr kumimoji="0" lang="en-US" altLang="en-US" sz="1800" b="0" i="0" u="none" strike="noStrike" cap="none" normalizeH="0" baseline="0" dirty="0">
                 <a:ln>
                   <a:noFill/>
                 </a:ln>
@@ -9360,7 +9375,7 @@
               <a:tabLst/>
             </a:pPr>
             <a:r>
-              <a:rPr kumimoji="0" lang="en-US" altLang="en-US" sz="1800" b="0" i="0" u="none" strike="noStrike" cap="none" normalizeH="0" baseline="0">
+              <a:rPr kumimoji="0" lang="en-US" altLang="en-US" sz="1800" b="0" i="0" u="none" strike="noStrike" cap="none" normalizeH="0" baseline="0" dirty="0">
                 <a:ln>
                   <a:noFill/>
                 </a:ln>
@@ -9391,7 +9406,7 @@
               <a:tabLst/>
             </a:pPr>
             <a:r>
-              <a:rPr kumimoji="0" lang="en-US" altLang="en-US" sz="1800" b="0" i="0" u="none" strike="noStrike" cap="none" normalizeH="0" baseline="0">
+              <a:rPr kumimoji="0" lang="en-US" altLang="en-US" sz="1800" b="0" i="0" u="none" strike="noStrike" cap="none" normalizeH="0" baseline="0" dirty="0">
                 <a:ln>
                   <a:noFill/>
                 </a:ln>
@@ -9422,7 +9437,7 @@
               <a:tabLst/>
             </a:pPr>
             <a:r>
-              <a:rPr kumimoji="0" lang="en-US" altLang="en-US" sz="1800" b="0" i="0" u="none" strike="noStrike" cap="none" normalizeH="0" baseline="0">
+              <a:rPr kumimoji="0" lang="en-US" altLang="en-US" sz="1800" b="0" i="0" u="none" strike="noStrike" cap="none" normalizeH="0" baseline="0" dirty="0">
                 <a:ln>
                   <a:noFill/>
                 </a:ln>
@@ -9453,7 +9468,7 @@
               <a:tabLst/>
             </a:pPr>
             <a:r>
-              <a:rPr kumimoji="0" lang="en-US" altLang="en-US" sz="1800" b="0" i="0" u="none" strike="noStrike" cap="none" normalizeH="0" baseline="0">
+              <a:rPr kumimoji="0" lang="en-US" altLang="en-US" sz="1800" b="0" i="0" u="none" strike="noStrike" cap="none" normalizeH="0" baseline="0" dirty="0">
                 <a:ln>
                   <a:noFill/>
                 </a:ln>
@@ -9484,7 +9499,7 @@
               <a:tabLst/>
             </a:pPr>
             <a:r>
-              <a:rPr kumimoji="0" lang="en-US" altLang="en-US" sz="1800" b="0" i="0" u="none" strike="noStrike" cap="none" normalizeH="0" baseline="0">
+              <a:rPr kumimoji="0" lang="en-US" altLang="en-US" sz="1800" b="0" i="0" u="none" strike="noStrike" cap="none" normalizeH="0" baseline="0" dirty="0">
                 <a:ln>
                   <a:noFill/>
                 </a:ln>
@@ -9510,22 +9525,21 @@
               </a:spcAft>
               <a:buClrTx/>
               <a:buSzTx/>
-              <a:buFontTx/>
-              <a:buAutoNum type="arabicPeriod" startAt="10"/>
+              <a:buNone/>
               <a:tabLst/>
             </a:pPr>
             <a:r>
-              <a:rPr kumimoji="0" lang="en-US" altLang="en-US" sz="1800" b="0" i="0" u="none" strike="noStrike" cap="none" normalizeH="0" baseline="0">
-                <a:ln>
-                  <a:noFill/>
-                </a:ln>
-                <a:solidFill>
-                  <a:schemeClr val="tx1"/>
-                </a:solidFill>
-                <a:effectLst/>
-                <a:latin typeface="Arial" panose="020B0604020202020204" pitchFamily="34" charset="0"/>
-              </a:rPr>
-              <a:t>Challenges &amp; Learnings</a:t>
+              <a:rPr kumimoji="0" lang="en-US" altLang="en-US" sz="1800" b="0" i="0" u="none" strike="noStrike" cap="none" normalizeH="0" baseline="0" dirty="0">
+                <a:ln>
+                  <a:noFill/>
+                </a:ln>
+                <a:solidFill>
+                  <a:schemeClr val="tx1"/>
+                </a:solidFill>
+                <a:effectLst/>
+                <a:latin typeface="Arial" panose="020B0604020202020204" pitchFamily="34" charset="0"/>
+              </a:rPr>
+              <a:t>10Conclusion</a:t>
             </a:r>
           </a:p>
           <a:p>
@@ -9542,41 +9556,10 @@
               <a:buClrTx/>
               <a:buSzTx/>
               <a:buFontTx/>
-              <a:buAutoNum type="arabicPeriod" startAt="11"/>
+              <a:buNone/>
               <a:tabLst/>
             </a:pPr>
-            <a:r>
-              <a:rPr kumimoji="0" lang="en-US" altLang="en-US" sz="1800" b="0" i="0" u="none" strike="noStrike" cap="none" normalizeH="0" baseline="0">
-                <a:ln>
-                  <a:noFill/>
-                </a:ln>
-                <a:solidFill>
-                  <a:schemeClr val="tx1"/>
-                </a:solidFill>
-                <a:effectLst/>
-                <a:latin typeface="Arial" panose="020B0604020202020204" pitchFamily="34" charset="0"/>
-              </a:rPr>
-              <a:t>Conclusion</a:t>
-            </a:r>
-          </a:p>
-          <a:p>
-            <a:pPr marL="0" marR="0" lvl="0" indent="0" algn="l" defTabSz="914400" rtl="0" eaLnBrk="0" fontAlgn="base" latinLnBrk="0" hangingPunct="0">
-              <a:lnSpc>
-                <a:spcPct val="100000"/>
-              </a:lnSpc>
-              <a:spcBef>
-                <a:spcPct val="0"/>
-              </a:spcBef>
-              <a:spcAft>
-                <a:spcPct val="0"/>
-              </a:spcAft>
-              <a:buClrTx/>
-              <a:buSzTx/>
-              <a:buFontTx/>
-              <a:buNone/>
-              <a:tabLst/>
-            </a:pPr>
-            <a:endParaRPr kumimoji="0" lang="en-US" altLang="en-US" sz="1800" b="0" i="0" u="none" strike="noStrike" cap="none" normalizeH="0" baseline="0">
+            <a:endParaRPr kumimoji="0" lang="en-US" altLang="en-US" sz="1800" b="0" i="0" u="none" strike="noStrike" cap="none" normalizeH="0" baseline="0" dirty="0">
               <a:ln>
                 <a:noFill/>
               </a:ln>
@@ -12241,10 +12224,38 @@
       </p:grpSpPr>
       <p:sp>
         <p:nvSpPr>
-          <p:cNvPr id="3" name="Rectangle 1">
+          <p:cNvPr id="2" name="Title 1">
             <a:extLst>
               <a:ext uri="{FF2B5EF4-FFF2-40B4-BE49-F238E27FC236}">
-                <a16:creationId xmlns:a16="http://schemas.microsoft.com/office/drawing/2014/main" id="{510745D9-6D11-48AB-9076-51CDD9300BD6}"/>
+                <a16:creationId xmlns:a16="http://schemas.microsoft.com/office/drawing/2014/main" id="{9C741392-B312-4C32-A862-321AEF2395C1}"/>
+              </a:ext>
+            </a:extLst>
+          </p:cNvPr>
+          <p:cNvSpPr>
+            <a:spLocks noGrp="1"/>
+          </p:cNvSpPr>
+          <p:nvPr>
+            <p:ph type="title"/>
+          </p:nvPr>
+        </p:nvSpPr>
+        <p:spPr/>
+        <p:txBody>
+          <a:bodyPr/>
+          <a:lstStyle/>
+          <a:p>
+            <a:r>
+              <a:rPr lang="en-IN" dirty="0"/>
+              <a:t>GitHub Integration</a:t>
+            </a:r>
+          </a:p>
+        </p:txBody>
+      </p:sp>
+      <p:sp>
+        <p:nvSpPr>
+          <p:cNvPr id="4" name="Rectangle 1">
+            <a:extLst>
+              <a:ext uri="{FF2B5EF4-FFF2-40B4-BE49-F238E27FC236}">
+                <a16:creationId xmlns:a16="http://schemas.microsoft.com/office/drawing/2014/main" id="{53875083-035E-473A-933C-AEAE62B1A8A0}"/>
               </a:ext>
             </a:extLst>
           </p:cNvPr>
@@ -12252,13 +12263,13 @@
             <a:spLocks noGrp="1" noChangeArrowheads="1"/>
           </p:cNvSpPr>
           <p:nvPr>
-            <p:ph type="title"/>
+            <p:ph idx="1"/>
           </p:nvPr>
         </p:nvSpPr>
         <p:spPr bwMode="auto">
           <a:xfrm>
-            <a:off x="753534" y="1038991"/>
-            <a:ext cx="9285816" cy="2862322"/>
+            <a:off x="677334" y="1066373"/>
+            <a:ext cx="9466791" cy="1477328"/>
           </a:xfrm>
           <a:prstGeom prst="rect">
             <a:avLst/>
@@ -12322,38 +12333,7 @@
               <a:buNone/>
               <a:tabLst/>
             </a:pPr>
-            <a:r>
-              <a:rPr kumimoji="0" lang="en-US" altLang="en-US" sz="4000" b="1" i="0" u="none" strike="noStrike" cap="none" normalizeH="0" baseline="0" dirty="0">
-                <a:ln>
-                  <a:noFill/>
-                </a:ln>
-                <a:solidFill>
-                  <a:schemeClr val="accent2"/>
-                </a:solidFill>
-                <a:effectLst/>
-                <a:latin typeface="Arial" panose="020B0604020202020204" pitchFamily="34" charset="0"/>
-              </a:rPr>
-              <a:t>THANK YOU</a:t>
-            </a:r>
-          </a:p>
-          <a:p>
-            <a:pPr marL="0" marR="0" lvl="0" indent="0" algn="l" defTabSz="914400" rtl="0" eaLnBrk="0" fontAlgn="base" latinLnBrk="0" hangingPunct="0">
-              <a:lnSpc>
-                <a:spcPct val="100000"/>
-              </a:lnSpc>
-              <a:spcBef>
-                <a:spcPct val="0"/>
-              </a:spcBef>
-              <a:spcAft>
-                <a:spcPct val="0"/>
-              </a:spcAft>
-              <a:buClrTx/>
-              <a:buSzTx/>
-              <a:buFontTx/>
-              <a:buNone/>
-              <a:tabLst/>
-            </a:pPr>
-            <a:endParaRPr kumimoji="0" lang="en-US" altLang="en-US" sz="2800" b="1" i="0" u="none" strike="noStrike" cap="none" normalizeH="0" baseline="0" dirty="0">
+            <a:endParaRPr kumimoji="0" lang="en-US" altLang="en-US" sz="1800" b="0" i="0" u="none" strike="noStrike" cap="none" normalizeH="0" baseline="0" dirty="0">
               <a:ln>
                 <a:noFill/>
               </a:ln>
@@ -12378,21 +12358,21 @@
               <a:buClrTx/>
               <a:buSzTx/>
               <a:buFontTx/>
-              <a:buNone/>
+              <a:buChar char="•"/>
               <a:tabLst/>
             </a:pPr>
             <a:r>
-              <a:rPr kumimoji="0" lang="en-US" altLang="en-US" sz="2800" b="1" i="0" u="none" strike="noStrike" cap="none" normalizeH="0" baseline="0" dirty="0">
-                <a:ln>
-                  <a:noFill/>
-                </a:ln>
-                <a:solidFill>
-                  <a:schemeClr val="tx1"/>
-                </a:solidFill>
-                <a:effectLst/>
-                <a:latin typeface="Arial" panose="020B0604020202020204" pitchFamily="34" charset="0"/>
-              </a:rPr>
-              <a:t>Questions &amp; Answers</a:t>
+              <a:rPr kumimoji="0" lang="en-US" altLang="en-US" sz="1800" b="0" i="0" u="none" strike="noStrike" cap="none" normalizeH="0" baseline="0" dirty="0">
+                <a:ln>
+                  <a:noFill/>
+                </a:ln>
+                <a:solidFill>
+                  <a:schemeClr val="tx1"/>
+                </a:solidFill>
+                <a:effectLst/>
+                <a:latin typeface="Arial" panose="020B0604020202020204" pitchFamily="34" charset="0"/>
+              </a:rPr>
+              <a:t>GitHub is used for source code management and version control. </a:t>
             </a:r>
           </a:p>
           <a:p>
@@ -12409,23 +12389,660 @@
               <a:buClrTx/>
               <a:buSzTx/>
               <a:buFontTx/>
-              <a:buNone/>
+              <a:buChar char="•"/>
               <a:tabLst/>
             </a:pPr>
             <a:r>
-              <a:rPr kumimoji="0" lang="en-US" altLang="en-US" sz="2800" b="1" i="0" u="none" strike="noStrike" cap="none" normalizeH="0" baseline="0" dirty="0">
-                <a:ln>
-                  <a:noFill/>
-                </a:ln>
-                <a:solidFill>
-                  <a:schemeClr val="tx1"/>
-                </a:solidFill>
-                <a:effectLst/>
-                <a:latin typeface="Arial" panose="020B0604020202020204" pitchFamily="34" charset="0"/>
-              </a:rPr>
-              <a:t>E-Commerce Application Testing Project</a:t>
-            </a:r>
-            <a:endParaRPr kumimoji="0" lang="en-US" altLang="en-US" sz="2800" b="0" i="0" u="none" strike="noStrike" cap="none" normalizeH="0" baseline="0" dirty="0">
+              <a:rPr kumimoji="0" lang="en-US" altLang="en-US" sz="1800" b="0" i="0" u="none" strike="noStrike" cap="none" normalizeH="0" baseline="0" dirty="0">
+                <a:ln>
+                  <a:noFill/>
+                </a:ln>
+                <a:solidFill>
+                  <a:schemeClr val="tx1"/>
+                </a:solidFill>
+                <a:effectLst/>
+                <a:latin typeface="Arial" panose="020B0604020202020204" pitchFamily="34" charset="0"/>
+              </a:rPr>
+              <a:t>Complete testing project is maintained in GitHub. </a:t>
+            </a:r>
+          </a:p>
+          <a:p>
+            <a:pPr marL="0" marR="0" lvl="0" indent="0" algn="l" defTabSz="914400" rtl="0" eaLnBrk="0" fontAlgn="base" latinLnBrk="0" hangingPunct="0">
+              <a:lnSpc>
+                <a:spcPct val="100000"/>
+              </a:lnSpc>
+              <a:spcBef>
+                <a:spcPct val="0"/>
+              </a:spcBef>
+              <a:spcAft>
+                <a:spcPct val="0"/>
+              </a:spcAft>
+              <a:buClrTx/>
+              <a:buSzTx/>
+              <a:buFontTx/>
+              <a:buChar char="•"/>
+              <a:tabLst/>
+            </a:pPr>
+            <a:r>
+              <a:rPr kumimoji="0" lang="en-US" altLang="en-US" sz="1800" b="0" i="0" u="none" strike="noStrike" cap="none" normalizeH="0" baseline="0" dirty="0">
+                <a:ln>
+                  <a:noFill/>
+                </a:ln>
+                <a:solidFill>
+                  <a:schemeClr val="tx1"/>
+                </a:solidFill>
+                <a:effectLst/>
+                <a:latin typeface="Arial" panose="020B0604020202020204" pitchFamily="34" charset="0"/>
+              </a:rPr>
+              <a:t>Project includes Manual Testing, Selenium Automation, API Testing and AI Testing. </a:t>
+            </a:r>
+          </a:p>
+          <a:p>
+            <a:pPr marL="0" marR="0" lvl="0" indent="0" algn="l" defTabSz="914400" rtl="0" eaLnBrk="0" fontAlgn="base" latinLnBrk="0" hangingPunct="0">
+              <a:lnSpc>
+                <a:spcPct val="100000"/>
+              </a:lnSpc>
+              <a:spcBef>
+                <a:spcPct val="0"/>
+              </a:spcBef>
+              <a:spcAft>
+                <a:spcPct val="0"/>
+              </a:spcAft>
+              <a:buClrTx/>
+              <a:buSzTx/>
+              <a:buFontTx/>
+              <a:buChar char="•"/>
+              <a:tabLst/>
+            </a:pPr>
+            <a:r>
+              <a:rPr kumimoji="0" lang="en-US" altLang="en-US" sz="1800" b="0" i="0" u="none" strike="noStrike" cap="none" normalizeH="0" baseline="0" dirty="0">
+                <a:ln>
+                  <a:noFill/>
+                </a:ln>
+                <a:solidFill>
+                  <a:schemeClr val="tx1"/>
+                </a:solidFill>
+                <a:effectLst/>
+                <a:latin typeface="Arial" panose="020B0604020202020204" pitchFamily="34" charset="0"/>
+              </a:rPr>
+              <a:t>Changes are committed and pushed to the GitHub repository. </a:t>
+            </a:r>
+          </a:p>
+        </p:txBody>
+      </p:sp>
+      <p:pic>
+        <p:nvPicPr>
+          <p:cNvPr id="5" name="Picture 4">
+            <a:extLst>
+              <a:ext uri="{FF2B5EF4-FFF2-40B4-BE49-F238E27FC236}">
+                <a16:creationId xmlns:a16="http://schemas.microsoft.com/office/drawing/2014/main" id="{E3FED010-C050-4C33-AF05-5578A5CB7F59}"/>
+              </a:ext>
+            </a:extLst>
+          </p:cNvPr>
+          <p:cNvPicPr>
+            <a:picLocks noChangeAspect="1"/>
+          </p:cNvPicPr>
+          <p:nvPr/>
+        </p:nvPicPr>
+        <p:blipFill>
+          <a:blip r:embed="rId2"/>
+          <a:stretch>
+            <a:fillRect/>
+          </a:stretch>
+        </p:blipFill>
+        <p:spPr>
+          <a:xfrm>
+            <a:off x="1104900" y="2657476"/>
+            <a:ext cx="7981950" cy="4200524"/>
+          </a:xfrm>
+          <a:prstGeom prst="rect">
+            <a:avLst/>
+          </a:prstGeom>
+        </p:spPr>
+      </p:pic>
+    </p:spTree>
+    <p:extLst>
+      <p:ext uri="{BB962C8B-B14F-4D97-AF65-F5344CB8AC3E}">
+        <p14:creationId xmlns:p14="http://schemas.microsoft.com/office/powerpoint/2010/main" val="1931725765"/>
+      </p:ext>
+    </p:extLst>
+  </p:cSld>
+  <p:clrMapOvr>
+    <a:masterClrMapping/>
+  </p:clrMapOvr>
+</p:sld>
+</file>
+
+<file path=ppt/slides/slide25.xml><?xml version="1.0" encoding="utf-8"?>
+<p:sld xmlns:a="http://schemas.openxmlformats.org/drawingml/2006/main" xmlns:r="http://schemas.openxmlformats.org/officeDocument/2006/relationships" xmlns:p="http://schemas.openxmlformats.org/presentationml/2006/main">
+  <p:cSld>
+    <p:spTree>
+      <p:nvGrpSpPr>
+        <p:cNvPr id="1" name=""/>
+        <p:cNvGrpSpPr/>
+        <p:nvPr/>
+      </p:nvGrpSpPr>
+      <p:grpSpPr>
+        <a:xfrm>
+          <a:off x="0" y="0"/>
+          <a:ext cx="0" cy="0"/>
+          <a:chOff x="0" y="0"/>
+          <a:chExt cx="0" cy="0"/>
+        </a:xfrm>
+      </p:grpSpPr>
+      <p:sp>
+        <p:nvSpPr>
+          <p:cNvPr id="2" name="Title 1">
+            <a:extLst>
+              <a:ext uri="{FF2B5EF4-FFF2-40B4-BE49-F238E27FC236}">
+                <a16:creationId xmlns:a16="http://schemas.microsoft.com/office/drawing/2014/main" id="{1D5109E1-14DD-418F-A3F1-2CD0B1347396}"/>
+              </a:ext>
+            </a:extLst>
+          </p:cNvPr>
+          <p:cNvSpPr>
+            <a:spLocks noGrp="1"/>
+          </p:cNvSpPr>
+          <p:nvPr>
+            <p:ph type="title"/>
+          </p:nvPr>
+        </p:nvSpPr>
+        <p:spPr>
+          <a:xfrm>
+            <a:off x="436034" y="88900"/>
+            <a:ext cx="8596668" cy="1320800"/>
+          </a:xfrm>
+        </p:spPr>
+        <p:txBody>
+          <a:bodyPr/>
+          <a:lstStyle/>
+          <a:p>
+            <a:r>
+              <a:rPr lang="en-IN" dirty="0"/>
+              <a:t>Git Version Control</a:t>
+            </a:r>
+          </a:p>
+        </p:txBody>
+      </p:sp>
+      <p:sp>
+        <p:nvSpPr>
+          <p:cNvPr id="3" name="Content Placeholder 2">
+            <a:extLst>
+              <a:ext uri="{FF2B5EF4-FFF2-40B4-BE49-F238E27FC236}">
+                <a16:creationId xmlns:a16="http://schemas.microsoft.com/office/drawing/2014/main" id="{B950A921-E351-40E7-B4B0-4443E263A138}"/>
+              </a:ext>
+            </a:extLst>
+          </p:cNvPr>
+          <p:cNvSpPr>
+            <a:spLocks noGrp="1"/>
+          </p:cNvSpPr>
+          <p:nvPr>
+            <p:ph idx="1"/>
+          </p:nvPr>
+        </p:nvSpPr>
+        <p:spPr>
+          <a:xfrm>
+            <a:off x="436034" y="795339"/>
+            <a:ext cx="2243666" cy="3497261"/>
+          </a:xfrm>
+        </p:spPr>
+        <p:txBody>
+          <a:bodyPr>
+            <a:normAutofit/>
+          </a:bodyPr>
+          <a:lstStyle/>
+          <a:p>
+            <a:r>
+              <a:rPr lang="en-IN" sz="1000" b="1" dirty="0"/>
+              <a:t>Local Project</a:t>
+            </a:r>
+          </a:p>
+          <a:p>
+            <a:r>
+              <a:rPr lang="en-IN" sz="1000" b="1" dirty="0"/>
+              <a:t>      ↓</a:t>
+            </a:r>
+          </a:p>
+          <a:p>
+            <a:r>
+              <a:rPr lang="en-IN" sz="1000" b="1" dirty="0"/>
+              <a:t>   Git Add</a:t>
+            </a:r>
+          </a:p>
+          <a:p>
+            <a:r>
+              <a:rPr lang="en-IN" sz="1000" b="1" dirty="0"/>
+              <a:t>      ↓</a:t>
+            </a:r>
+          </a:p>
+          <a:p>
+            <a:r>
+              <a:rPr lang="en-IN" sz="1000" b="1" dirty="0"/>
+              <a:t>   Commit</a:t>
+            </a:r>
+          </a:p>
+          <a:p>
+            <a:r>
+              <a:rPr lang="en-IN" sz="1000" b="1" dirty="0"/>
+              <a:t>      ↓</a:t>
+            </a:r>
+          </a:p>
+          <a:p>
+            <a:r>
+              <a:rPr lang="en-IN" sz="1000" b="1" dirty="0"/>
+              <a:t>    Push</a:t>
+            </a:r>
+          </a:p>
+          <a:p>
+            <a:r>
+              <a:rPr lang="en-IN" sz="1000" b="1" dirty="0"/>
+              <a:t>      ↓</a:t>
+            </a:r>
+          </a:p>
+          <a:p>
+            <a:r>
+              <a:rPr lang="en-IN" sz="1000" b="1" dirty="0"/>
+              <a:t>   GitHub</a:t>
+            </a:r>
+          </a:p>
+          <a:p>
+            <a:pPr marL="0" indent="0">
+              <a:buNone/>
+            </a:pPr>
+            <a:r>
+              <a:rPr lang="en-US" sz="1000" dirty="0">
+                <a:solidFill>
+                  <a:srgbClr val="7030A0"/>
+                </a:solidFill>
+              </a:rPr>
+              <a:t>git add .</a:t>
+            </a:r>
+          </a:p>
+          <a:p>
+            <a:pPr marL="0" indent="0">
+              <a:buNone/>
+            </a:pPr>
+            <a:r>
+              <a:rPr lang="en-US" sz="1000" dirty="0">
+                <a:solidFill>
+                  <a:srgbClr val="7030A0"/>
+                </a:solidFill>
+              </a:rPr>
+              <a:t>git commit -m "Update project" </a:t>
+            </a:r>
+          </a:p>
+          <a:p>
+            <a:pPr marL="0" indent="0">
+              <a:buNone/>
+            </a:pPr>
+            <a:r>
+              <a:rPr lang="en-US" sz="1000" dirty="0">
+                <a:solidFill>
+                  <a:srgbClr val="7030A0"/>
+                </a:solidFill>
+              </a:rPr>
+              <a:t>git push origin main</a:t>
+            </a:r>
+            <a:endParaRPr lang="en-IN" sz="1000" b="1" dirty="0">
+              <a:solidFill>
+                <a:srgbClr val="7030A0"/>
+              </a:solidFill>
+            </a:endParaRPr>
+          </a:p>
+          <a:p>
+            <a:endParaRPr lang="en-US" dirty="0"/>
+          </a:p>
+          <a:p>
+            <a:endParaRPr lang="en-IN" dirty="0"/>
+          </a:p>
+        </p:txBody>
+      </p:sp>
+      <p:pic>
+        <p:nvPicPr>
+          <p:cNvPr id="4" name="Picture 3">
+            <a:extLst>
+              <a:ext uri="{FF2B5EF4-FFF2-40B4-BE49-F238E27FC236}">
+                <a16:creationId xmlns:a16="http://schemas.microsoft.com/office/drawing/2014/main" id="{7B3DF126-9C1D-4B8E-BB4D-0B7BD8DE2EB5}"/>
+              </a:ext>
+            </a:extLst>
+          </p:cNvPr>
+          <p:cNvPicPr>
+            <a:picLocks noChangeAspect="1"/>
+          </p:cNvPicPr>
+          <p:nvPr/>
+        </p:nvPicPr>
+        <p:blipFill>
+          <a:blip r:embed="rId2"/>
+          <a:stretch>
+            <a:fillRect/>
+          </a:stretch>
+        </p:blipFill>
+        <p:spPr>
+          <a:xfrm>
+            <a:off x="2522450" y="933450"/>
+            <a:ext cx="9233515" cy="5746750"/>
+          </a:xfrm>
+          <a:prstGeom prst="rect">
+            <a:avLst/>
+          </a:prstGeom>
+        </p:spPr>
+      </p:pic>
+    </p:spTree>
+    <p:extLst>
+      <p:ext uri="{BB962C8B-B14F-4D97-AF65-F5344CB8AC3E}">
+        <p14:creationId xmlns:p14="http://schemas.microsoft.com/office/powerpoint/2010/main" val="2782772738"/>
+      </p:ext>
+    </p:extLst>
+  </p:cSld>
+  <p:clrMapOvr>
+    <a:masterClrMapping/>
+  </p:clrMapOvr>
+</p:sld>
+</file>
+
+<file path=ppt/slides/slide26.xml><?xml version="1.0" encoding="utf-8"?>
+<p:sld xmlns:a="http://schemas.openxmlformats.org/drawingml/2006/main" xmlns:r="http://schemas.openxmlformats.org/officeDocument/2006/relationships" xmlns:p="http://schemas.openxmlformats.org/presentationml/2006/main">
+  <p:cSld>
+    <p:spTree>
+      <p:nvGrpSpPr>
+        <p:cNvPr id="1" name=""/>
+        <p:cNvGrpSpPr/>
+        <p:nvPr/>
+      </p:nvGrpSpPr>
+      <p:grpSpPr>
+        <a:xfrm>
+          <a:off x="0" y="0"/>
+          <a:ext cx="0" cy="0"/>
+          <a:chOff x="0" y="0"/>
+          <a:chExt cx="0" cy="0"/>
+        </a:xfrm>
+      </p:grpSpPr>
+      <p:sp>
+        <p:nvSpPr>
+          <p:cNvPr id="2" name="Title 1">
+            <a:extLst>
+              <a:ext uri="{FF2B5EF4-FFF2-40B4-BE49-F238E27FC236}">
+                <a16:creationId xmlns:a16="http://schemas.microsoft.com/office/drawing/2014/main" id="{1368EE79-0A13-4C8A-90E2-3C998797E7A6}"/>
+              </a:ext>
+            </a:extLst>
+          </p:cNvPr>
+          <p:cNvSpPr>
+            <a:spLocks noGrp="1"/>
+          </p:cNvSpPr>
+          <p:nvPr>
+            <p:ph type="title"/>
+          </p:nvPr>
+        </p:nvSpPr>
+        <p:spPr/>
+        <p:txBody>
+          <a:bodyPr/>
+          <a:lstStyle/>
+          <a:p>
+            <a:r>
+              <a:rPr lang="en-IN" dirty="0"/>
+              <a:t>CI/CD Pipeline</a:t>
+            </a:r>
+          </a:p>
+        </p:txBody>
+      </p:sp>
+      <p:sp>
+        <p:nvSpPr>
+          <p:cNvPr id="3" name="Content Placeholder 2">
+            <a:extLst>
+              <a:ext uri="{FF2B5EF4-FFF2-40B4-BE49-F238E27FC236}">
+                <a16:creationId xmlns:a16="http://schemas.microsoft.com/office/drawing/2014/main" id="{6F4A4A4D-E38B-4376-A325-E85EEE212FCA}"/>
+              </a:ext>
+            </a:extLst>
+          </p:cNvPr>
+          <p:cNvSpPr>
+            <a:spLocks noGrp="1"/>
+          </p:cNvSpPr>
+          <p:nvPr>
+            <p:ph idx="1"/>
+          </p:nvPr>
+        </p:nvSpPr>
+        <p:spPr>
+          <a:xfrm>
+            <a:off x="677334" y="2160589"/>
+            <a:ext cx="2856441" cy="3880773"/>
+          </a:xfrm>
+        </p:spPr>
+        <p:txBody>
+          <a:bodyPr/>
+          <a:lstStyle/>
+          <a:p>
+            <a:r>
+              <a:rPr lang="en-US" dirty="0"/>
+              <a:t>GitHub</a:t>
+            </a:r>
+          </a:p>
+          <a:p>
+            <a:r>
+              <a:rPr lang="en-US" dirty="0"/>
+              <a:t>   ↓</a:t>
+            </a:r>
+          </a:p>
+          <a:p>
+            <a:r>
+              <a:rPr lang="en-US" dirty="0"/>
+              <a:t>Jenkins</a:t>
+            </a:r>
+          </a:p>
+          <a:p>
+            <a:r>
+              <a:rPr lang="en-US" dirty="0"/>
+              <a:t>   ↓</a:t>
+            </a:r>
+          </a:p>
+          <a:p>
+            <a:r>
+              <a:rPr lang="en-US" dirty="0"/>
+              <a:t>Maven</a:t>
+            </a:r>
+          </a:p>
+          <a:p>
+            <a:r>
+              <a:rPr lang="en-US" dirty="0"/>
+              <a:t>   ↓</a:t>
+            </a:r>
+          </a:p>
+          <a:p>
+            <a:r>
+              <a:rPr lang="en-US" dirty="0"/>
+              <a:t>Automated Test Execution</a:t>
+            </a:r>
+          </a:p>
+          <a:p>
+            <a:r>
+              <a:rPr lang="en-US" dirty="0"/>
+              <a:t>   ↓</a:t>
+            </a:r>
+          </a:p>
+          <a:p>
+            <a:r>
+              <a:rPr lang="en-US" dirty="0"/>
+              <a:t>Test Results</a:t>
+            </a:r>
+            <a:endParaRPr lang="en-IN" dirty="0"/>
+          </a:p>
+        </p:txBody>
+      </p:sp>
+      <p:pic>
+        <p:nvPicPr>
+          <p:cNvPr id="4" name="Picture 3">
+            <a:extLst>
+              <a:ext uri="{FF2B5EF4-FFF2-40B4-BE49-F238E27FC236}">
+                <a16:creationId xmlns:a16="http://schemas.microsoft.com/office/drawing/2014/main" id="{9F17E023-3341-4557-8812-B07A5CA2A2AD}"/>
+              </a:ext>
+            </a:extLst>
+          </p:cNvPr>
+          <p:cNvPicPr>
+            <a:picLocks noChangeAspect="1"/>
+          </p:cNvPicPr>
+          <p:nvPr/>
+        </p:nvPicPr>
+        <p:blipFill>
+          <a:blip r:embed="rId2"/>
+          <a:stretch>
+            <a:fillRect/>
+          </a:stretch>
+        </p:blipFill>
+        <p:spPr>
+          <a:xfrm>
+            <a:off x="3895725" y="225260"/>
+            <a:ext cx="8242610" cy="6407479"/>
+          </a:xfrm>
+          <a:prstGeom prst="rect">
+            <a:avLst/>
+          </a:prstGeom>
+        </p:spPr>
+      </p:pic>
+    </p:spTree>
+    <p:extLst>
+      <p:ext uri="{BB962C8B-B14F-4D97-AF65-F5344CB8AC3E}">
+        <p14:creationId xmlns:p14="http://schemas.microsoft.com/office/powerpoint/2010/main" val="2782307751"/>
+      </p:ext>
+    </p:extLst>
+  </p:cSld>
+  <p:clrMapOvr>
+    <a:masterClrMapping/>
+  </p:clrMapOvr>
+</p:sld>
+</file>
+
+<file path=ppt/slides/slide27.xml><?xml version="1.0" encoding="utf-8"?>
+<p:sld xmlns:a="http://schemas.openxmlformats.org/drawingml/2006/main" xmlns:r="http://schemas.openxmlformats.org/officeDocument/2006/relationships" xmlns:p="http://schemas.openxmlformats.org/presentationml/2006/main">
+  <p:cSld>
+    <p:spTree>
+      <p:nvGrpSpPr>
+        <p:cNvPr id="1" name=""/>
+        <p:cNvGrpSpPr/>
+        <p:nvPr/>
+      </p:nvGrpSpPr>
+      <p:grpSpPr>
+        <a:xfrm>
+          <a:off x="0" y="0"/>
+          <a:ext cx="0" cy="0"/>
+          <a:chOff x="0" y="0"/>
+          <a:chExt cx="0" cy="0"/>
+        </a:xfrm>
+      </p:grpSpPr>
+      <p:sp>
+        <p:nvSpPr>
+          <p:cNvPr id="2" name="Title 1">
+            <a:extLst>
+              <a:ext uri="{FF2B5EF4-FFF2-40B4-BE49-F238E27FC236}">
+                <a16:creationId xmlns:a16="http://schemas.microsoft.com/office/drawing/2014/main" id="{A32AEE7D-F24C-4CFD-A76D-A276992F644A}"/>
+              </a:ext>
+            </a:extLst>
+          </p:cNvPr>
+          <p:cNvSpPr>
+            <a:spLocks noGrp="1"/>
+          </p:cNvSpPr>
+          <p:nvPr>
+            <p:ph type="title"/>
+          </p:nvPr>
+        </p:nvSpPr>
+        <p:spPr>
+          <a:xfrm>
+            <a:off x="86784" y="406240"/>
+            <a:ext cx="8596668" cy="1320800"/>
+          </a:xfrm>
+        </p:spPr>
+        <p:txBody>
+          <a:bodyPr/>
+          <a:lstStyle/>
+          <a:p>
+            <a:r>
+              <a:rPr lang="en-IN" dirty="0"/>
+              <a:t>Jenkins – CI/CD Execution</a:t>
+            </a:r>
+          </a:p>
+        </p:txBody>
+      </p:sp>
+      <p:sp>
+        <p:nvSpPr>
+          <p:cNvPr id="4" name="Rectangle 1">
+            <a:extLst>
+              <a:ext uri="{FF2B5EF4-FFF2-40B4-BE49-F238E27FC236}">
+                <a16:creationId xmlns:a16="http://schemas.microsoft.com/office/drawing/2014/main" id="{B6A42BFD-84D0-4FAA-9398-13E6517515AF}"/>
+              </a:ext>
+            </a:extLst>
+          </p:cNvPr>
+          <p:cNvSpPr>
+            <a:spLocks noGrp="1" noChangeArrowheads="1"/>
+          </p:cNvSpPr>
+          <p:nvPr>
+            <p:ph idx="1"/>
+          </p:nvPr>
+        </p:nvSpPr>
+        <p:spPr bwMode="auto">
+          <a:xfrm>
+            <a:off x="220134" y="945117"/>
+            <a:ext cx="4990041" cy="2585323"/>
+          </a:xfrm>
+          <a:prstGeom prst="rect">
+            <a:avLst/>
+          </a:prstGeom>
+          <a:noFill/>
+          <a:ln>
+            <a:noFill/>
+          </a:ln>
+          <a:effectLst/>
+          <a:extLst>
+            <a:ext uri="{909E8E84-426E-40DD-AFC4-6F175D3DCCD1}">
+              <a14:hiddenFill xmlns:a14="http://schemas.microsoft.com/office/drawing/2010/main">
+                <a:solidFill>
+                  <a:schemeClr val="accent1"/>
+                </a:solidFill>
+              </a14:hiddenFill>
+            </a:ext>
+            <a:ext uri="{91240B29-F687-4F45-9708-019B960494DF}">
+              <a14:hiddenLine xmlns:a14="http://schemas.microsoft.com/office/drawing/2010/main" w="9525">
+                <a:solidFill>
+                  <a:schemeClr val="tx1"/>
+                </a:solidFill>
+                <a:miter lim="800000"/>
+                <a:headEnd/>
+                <a:tailEnd/>
+              </a14:hiddenLine>
+            </a:ext>
+            <a:ext uri="{AF507438-7753-43E0-B8FC-AC1667EBCBE1}">
+              <a14:hiddenEffects xmlns:a14="http://schemas.microsoft.com/office/drawing/2010/main">
+                <a:effectLst>
+                  <a:outerShdw dist="35921" dir="2700000" algn="ctr" rotWithShape="0">
+                    <a:schemeClr val="bg2"/>
+                  </a:outerShdw>
+                </a:effectLst>
+              </a14:hiddenEffects>
+            </a:ext>
+          </a:extLst>
+        </p:spPr>
+        <p:txBody>
+          <a:bodyPr vert="horz" wrap="square" lIns="91440" tIns="45720" rIns="91440" bIns="45720" numCol="1" anchor="ctr" anchorCtr="0" compatLnSpc="1">
+            <a:prstTxWarp prst="textNoShape">
+              <a:avLst/>
+            </a:prstTxWarp>
+            <a:spAutoFit/>
+          </a:bodyPr>
+          <a:lstStyle/>
+          <a:p>
+            <a:pPr marL="0" marR="0" lvl="0" indent="0" algn="l" defTabSz="914400" rtl="0" eaLnBrk="0" fontAlgn="base" latinLnBrk="0" hangingPunct="0">
+              <a:lnSpc>
+                <a:spcPct val="100000"/>
+              </a:lnSpc>
+              <a:spcBef>
+                <a:spcPct val="0"/>
+              </a:spcBef>
+              <a:spcAft>
+                <a:spcPct val="0"/>
+              </a:spcAft>
+              <a:buClrTx/>
+              <a:buSzTx/>
+              <a:buFontTx/>
+              <a:buNone/>
+              <a:tabLst/>
+            </a:pPr>
+            <a:endParaRPr kumimoji="0" lang="en-US" altLang="en-US" sz="1800" b="0" i="0" u="none" strike="noStrike" cap="none" normalizeH="0" baseline="0" dirty="0">
               <a:ln>
                 <a:noFill/>
               </a:ln>
@@ -12450,29 +13067,987 @@
               <a:buClrTx/>
               <a:buSzTx/>
               <a:buFontTx/>
-              <a:buNone/>
+              <a:buChar char="•"/>
               <a:tabLst/>
             </a:pPr>
             <a:r>
-              <a:rPr kumimoji="0" lang="en-US" altLang="en-US" sz="2800" b="0" i="0" u="none" strike="noStrike" cap="none" normalizeH="0" baseline="0" dirty="0">
-                <a:ln>
-                  <a:noFill/>
-                </a:ln>
-                <a:solidFill>
-                  <a:schemeClr val="tx1"/>
-                </a:solidFill>
-                <a:effectLst/>
-                <a:latin typeface="Arial" panose="020B0604020202020204" pitchFamily="34" charset="0"/>
-              </a:rPr>
-              <a:t>Manual Testing | Selenium Automation | API Testing | AI Testing</a:t>
-            </a:r>
+              <a:rPr kumimoji="0" lang="en-US" altLang="en-US" sz="1800" b="0" i="0" u="none" strike="noStrike" cap="none" normalizeH="0" baseline="0" dirty="0">
+                <a:ln>
+                  <a:noFill/>
+                </a:ln>
+                <a:solidFill>
+                  <a:schemeClr val="tx1"/>
+                </a:solidFill>
+                <a:effectLst/>
+                <a:latin typeface="Arial" panose="020B0604020202020204" pitchFamily="34" charset="0"/>
+              </a:rPr>
+              <a:t>Jenkins retrieves the project from GitHub. </a:t>
+            </a:r>
+          </a:p>
+          <a:p>
+            <a:pPr marL="0" marR="0" lvl="0" indent="0" algn="l" defTabSz="914400" rtl="0" eaLnBrk="0" fontAlgn="base" latinLnBrk="0" hangingPunct="0">
+              <a:lnSpc>
+                <a:spcPct val="100000"/>
+              </a:lnSpc>
+              <a:spcBef>
+                <a:spcPct val="0"/>
+              </a:spcBef>
+              <a:spcAft>
+                <a:spcPct val="0"/>
+              </a:spcAft>
+              <a:buClrTx/>
+              <a:buSzTx/>
+              <a:buFontTx/>
+              <a:buChar char="•"/>
+              <a:tabLst/>
+            </a:pPr>
+            <a:r>
+              <a:rPr kumimoji="0" lang="en-US" altLang="en-US" sz="1800" b="0" i="0" u="none" strike="noStrike" cap="none" normalizeH="0" baseline="0" dirty="0">
+                <a:ln>
+                  <a:noFill/>
+                </a:ln>
+                <a:solidFill>
+                  <a:schemeClr val="tx1"/>
+                </a:solidFill>
+                <a:effectLst/>
+                <a:latin typeface="Arial" panose="020B0604020202020204" pitchFamily="34" charset="0"/>
+              </a:rPr>
+              <a:t>Maven builds and executes the automation tests. </a:t>
+            </a:r>
+          </a:p>
+          <a:p>
+            <a:pPr marL="0" marR="0" lvl="0" indent="0" algn="l" defTabSz="914400" rtl="0" eaLnBrk="0" fontAlgn="base" latinLnBrk="0" hangingPunct="0">
+              <a:lnSpc>
+                <a:spcPct val="100000"/>
+              </a:lnSpc>
+              <a:spcBef>
+                <a:spcPct val="0"/>
+              </a:spcBef>
+              <a:spcAft>
+                <a:spcPct val="0"/>
+              </a:spcAft>
+              <a:buClrTx/>
+              <a:buSzTx/>
+              <a:buFontTx/>
+              <a:buChar char="•"/>
+              <a:tabLst/>
+            </a:pPr>
+            <a:r>
+              <a:rPr kumimoji="0" lang="en-US" altLang="en-US" sz="1800" b="0" i="0" u="none" strike="noStrike" cap="none" normalizeH="0" baseline="0" dirty="0">
+                <a:ln>
+                  <a:noFill/>
+                </a:ln>
+                <a:solidFill>
+                  <a:schemeClr val="tx1"/>
+                </a:solidFill>
+                <a:effectLst/>
+                <a:latin typeface="Arial" panose="020B0604020202020204" pitchFamily="34" charset="0"/>
+              </a:rPr>
+              <a:t>Selenium and TestNG tests are executed automatically. </a:t>
+            </a:r>
+          </a:p>
+          <a:p>
+            <a:pPr marL="0" marR="0" lvl="0" indent="0" algn="l" defTabSz="914400" rtl="0" eaLnBrk="0" fontAlgn="base" latinLnBrk="0" hangingPunct="0">
+              <a:lnSpc>
+                <a:spcPct val="100000"/>
+              </a:lnSpc>
+              <a:spcBef>
+                <a:spcPct val="0"/>
+              </a:spcBef>
+              <a:spcAft>
+                <a:spcPct val="0"/>
+              </a:spcAft>
+              <a:buClrTx/>
+              <a:buSzTx/>
+              <a:buFontTx/>
+              <a:buChar char="•"/>
+              <a:tabLst/>
+            </a:pPr>
+            <a:r>
+              <a:rPr kumimoji="0" lang="en-US" altLang="en-US" sz="1800" b="0" i="0" u="none" strike="noStrike" cap="none" normalizeH="0" baseline="0" dirty="0">
+                <a:ln>
+                  <a:noFill/>
+                </a:ln>
+                <a:solidFill>
+                  <a:schemeClr val="tx1"/>
+                </a:solidFill>
+                <a:effectLst/>
+                <a:latin typeface="Arial" panose="020B0604020202020204" pitchFamily="34" charset="0"/>
+              </a:rPr>
+              <a:t>Test execution results are available in Jenkins. </a:t>
+            </a:r>
+          </a:p>
+          <a:p>
+            <a:pPr marL="0" lvl="0" indent="0" defTabSz="914400" eaLnBrk="0" fontAlgn="base" hangingPunct="0">
+              <a:spcBef>
+                <a:spcPct val="0"/>
+              </a:spcBef>
+              <a:spcAft>
+                <a:spcPct val="0"/>
+              </a:spcAft>
+              <a:buClrTx/>
+              <a:buSzTx/>
+              <a:buFontTx/>
+              <a:buChar char="•"/>
+            </a:pPr>
+            <a:r>
+              <a:rPr lang="en-US" altLang="en-US" dirty="0" err="1">
+                <a:solidFill>
+                  <a:schemeClr val="tx1"/>
+                </a:solidFill>
+                <a:latin typeface="Arial" panose="020B0604020202020204" pitchFamily="34" charset="0"/>
+              </a:rPr>
+              <a:t>mvn</a:t>
+            </a:r>
+            <a:r>
+              <a:rPr lang="en-US" altLang="en-US" dirty="0">
+                <a:solidFill>
+                  <a:schemeClr val="tx1"/>
+                </a:solidFill>
+                <a:latin typeface="Arial" panose="020B0604020202020204" pitchFamily="34" charset="0"/>
+              </a:rPr>
+              <a:t> -f EcommerceAutomation2/pom.xml clean test</a:t>
+            </a:r>
+            <a:endParaRPr kumimoji="0" lang="en-US" altLang="en-US" sz="1800" b="0" i="0" u="none" strike="noStrike" cap="none" normalizeH="0" baseline="0" dirty="0">
+              <a:ln>
+                <a:noFill/>
+              </a:ln>
+              <a:solidFill>
+                <a:schemeClr val="tx1"/>
+              </a:solidFill>
+              <a:effectLst/>
+              <a:latin typeface="Arial" panose="020B0604020202020204" pitchFamily="34" charset="0"/>
+            </a:endParaRPr>
+          </a:p>
+        </p:txBody>
+      </p:sp>
+      <p:pic>
+        <p:nvPicPr>
+          <p:cNvPr id="5" name="Picture 4">
+            <a:extLst>
+              <a:ext uri="{FF2B5EF4-FFF2-40B4-BE49-F238E27FC236}">
+                <a16:creationId xmlns:a16="http://schemas.microsoft.com/office/drawing/2014/main" id="{9F398E37-B98C-4973-9E1F-C052B10E1DD1}"/>
+              </a:ext>
+            </a:extLst>
+          </p:cNvPr>
+          <p:cNvPicPr>
+            <a:picLocks noChangeAspect="1"/>
+          </p:cNvPicPr>
+          <p:nvPr/>
+        </p:nvPicPr>
+        <p:blipFill>
+          <a:blip r:embed="rId2"/>
+          <a:stretch>
+            <a:fillRect/>
+          </a:stretch>
+        </p:blipFill>
+        <p:spPr>
+          <a:xfrm>
+            <a:off x="5035239" y="1038225"/>
+            <a:ext cx="6936627" cy="5413535"/>
+          </a:xfrm>
+          <a:prstGeom prst="rect">
+            <a:avLst/>
+          </a:prstGeom>
+        </p:spPr>
+      </p:pic>
+    </p:spTree>
+    <p:extLst>
+      <p:ext uri="{BB962C8B-B14F-4D97-AF65-F5344CB8AC3E}">
+        <p14:creationId xmlns:p14="http://schemas.microsoft.com/office/powerpoint/2010/main" val="1616089624"/>
+      </p:ext>
+    </p:extLst>
+  </p:cSld>
+  <p:clrMapOvr>
+    <a:masterClrMapping/>
+  </p:clrMapOvr>
+</p:sld>
+</file>
+
+<file path=ppt/slides/slide28.xml><?xml version="1.0" encoding="utf-8"?>
+<p:sld xmlns:a="http://schemas.openxmlformats.org/drawingml/2006/main" xmlns:r="http://schemas.openxmlformats.org/officeDocument/2006/relationships" xmlns:p="http://schemas.openxmlformats.org/presentationml/2006/main">
+  <p:cSld>
+    <p:spTree>
+      <p:nvGrpSpPr>
+        <p:cNvPr id="1" name=""/>
+        <p:cNvGrpSpPr/>
+        <p:nvPr/>
+      </p:nvGrpSpPr>
+      <p:grpSpPr>
+        <a:xfrm>
+          <a:off x="0" y="0"/>
+          <a:ext cx="0" cy="0"/>
+          <a:chOff x="0" y="0"/>
+          <a:chExt cx="0" cy="0"/>
+        </a:xfrm>
+      </p:grpSpPr>
+      <p:sp>
+        <p:nvSpPr>
+          <p:cNvPr id="2" name="Title 1">
+            <a:extLst>
+              <a:ext uri="{FF2B5EF4-FFF2-40B4-BE49-F238E27FC236}">
+                <a16:creationId xmlns:a16="http://schemas.microsoft.com/office/drawing/2014/main" id="{68030179-E99E-4472-9770-A62C17A06BD5}"/>
+              </a:ext>
+            </a:extLst>
+          </p:cNvPr>
+          <p:cNvSpPr>
+            <a:spLocks noGrp="1"/>
+          </p:cNvSpPr>
+          <p:nvPr>
+            <p:ph type="title"/>
+          </p:nvPr>
+        </p:nvSpPr>
+        <p:spPr/>
+        <p:txBody>
+          <a:bodyPr/>
+          <a:lstStyle/>
+          <a:p>
+            <a:r>
+              <a:rPr lang="en-IN" dirty="0"/>
+              <a:t>CI/CD Execution Result</a:t>
+            </a:r>
+          </a:p>
+        </p:txBody>
+      </p:sp>
+      <p:sp>
+        <p:nvSpPr>
+          <p:cNvPr id="3" name="Content Placeholder 2">
+            <a:extLst>
+              <a:ext uri="{FF2B5EF4-FFF2-40B4-BE49-F238E27FC236}">
+                <a16:creationId xmlns:a16="http://schemas.microsoft.com/office/drawing/2014/main" id="{401FA865-BA90-4100-A8D2-8EFDC1C21A9A}"/>
+              </a:ext>
+            </a:extLst>
+          </p:cNvPr>
+          <p:cNvSpPr>
+            <a:spLocks noGrp="1"/>
+          </p:cNvSpPr>
+          <p:nvPr>
+            <p:ph idx="1"/>
+          </p:nvPr>
+        </p:nvSpPr>
+        <p:spPr>
+          <a:xfrm>
+            <a:off x="677334" y="1270000"/>
+            <a:ext cx="4570941" cy="1920875"/>
+          </a:xfrm>
+        </p:spPr>
+        <p:txBody>
+          <a:bodyPr>
+            <a:normAutofit fontScale="70000" lnSpcReduction="20000"/>
+          </a:bodyPr>
+          <a:lstStyle/>
+          <a:p>
+            <a:r>
+              <a:rPr lang="en-IN" dirty="0"/>
+              <a:t>GitHub successfully integrated with Jenkins. </a:t>
+            </a:r>
+          </a:p>
+          <a:p>
+            <a:r>
+              <a:rPr lang="en-IN" dirty="0"/>
+              <a:t>Maven automation build executed through Jenkins. </a:t>
+            </a:r>
+          </a:p>
+          <a:p>
+            <a:r>
+              <a:rPr lang="en-IN" dirty="0"/>
+              <a:t>Selenium automation tests executed successfully. </a:t>
+            </a:r>
+          </a:p>
+          <a:p>
+            <a:r>
+              <a:rPr lang="en-IN" dirty="0"/>
+              <a:t>API automation has a separate Jenkins job: </a:t>
+            </a:r>
+            <a:r>
+              <a:rPr lang="en-IN" b="1" dirty="0"/>
+              <a:t>Ecommerce-API</a:t>
+            </a:r>
+            <a:r>
+              <a:rPr lang="en-IN" dirty="0"/>
+              <a:t>. </a:t>
+            </a:r>
+          </a:p>
+          <a:p>
+            <a:r>
+              <a:rPr lang="en-IN" dirty="0"/>
+              <a:t>Test execution results were verified in Jenkins. </a:t>
+            </a:r>
+          </a:p>
+          <a:p>
+            <a:r>
+              <a:rPr lang="en-IN" dirty="0"/>
+              <a:t>📸 </a:t>
+            </a:r>
+            <a:r>
+              <a:rPr lang="en-IN" b="1" dirty="0"/>
+              <a:t>Screenshots:</a:t>
+            </a:r>
+            <a:endParaRPr lang="en-IN" dirty="0"/>
+          </a:p>
+          <a:p>
+            <a:endParaRPr lang="en-IN" dirty="0"/>
+          </a:p>
+        </p:txBody>
+      </p:sp>
+      <p:pic>
+        <p:nvPicPr>
+          <p:cNvPr id="4" name="Picture 3">
+            <a:extLst>
+              <a:ext uri="{FF2B5EF4-FFF2-40B4-BE49-F238E27FC236}">
+                <a16:creationId xmlns:a16="http://schemas.microsoft.com/office/drawing/2014/main" id="{679F10EF-4CD6-4C22-A09C-45130B746ECE}"/>
+              </a:ext>
+            </a:extLst>
+          </p:cNvPr>
+          <p:cNvPicPr>
+            <a:picLocks noChangeAspect="1"/>
+          </p:cNvPicPr>
+          <p:nvPr/>
+        </p:nvPicPr>
+        <p:blipFill>
+          <a:blip r:embed="rId2"/>
+          <a:stretch>
+            <a:fillRect/>
+          </a:stretch>
+        </p:blipFill>
+        <p:spPr>
+          <a:xfrm>
+            <a:off x="4991100" y="1181100"/>
+            <a:ext cx="7038975" cy="5191276"/>
+          </a:xfrm>
+          <a:prstGeom prst="rect">
+            <a:avLst/>
+          </a:prstGeom>
+        </p:spPr>
+      </p:pic>
+    </p:spTree>
+    <p:extLst>
+      <p:ext uri="{BB962C8B-B14F-4D97-AF65-F5344CB8AC3E}">
+        <p14:creationId xmlns:p14="http://schemas.microsoft.com/office/powerpoint/2010/main" val="2326130557"/>
+      </p:ext>
+    </p:extLst>
+  </p:cSld>
+  <p:clrMapOvr>
+    <a:masterClrMapping/>
+  </p:clrMapOvr>
+</p:sld>
+</file>
+
+<file path=ppt/slides/slide29.xml><?xml version="1.0" encoding="utf-8"?>
+<p:sld xmlns:a="http://schemas.openxmlformats.org/drawingml/2006/main" xmlns:r="http://schemas.openxmlformats.org/officeDocument/2006/relationships" xmlns:p="http://schemas.openxmlformats.org/presentationml/2006/main">
+  <p:cSld>
+    <p:spTree>
+      <p:nvGrpSpPr>
+        <p:cNvPr id="1" name=""/>
+        <p:cNvGrpSpPr/>
+        <p:nvPr/>
+      </p:nvGrpSpPr>
+      <p:grpSpPr>
+        <a:xfrm>
+          <a:off x="0" y="0"/>
+          <a:ext cx="0" cy="0"/>
+          <a:chOff x="0" y="0"/>
+          <a:chExt cx="0" cy="0"/>
+        </a:xfrm>
+      </p:grpSpPr>
+      <p:sp>
+        <p:nvSpPr>
+          <p:cNvPr id="2" name="Title 1">
+            <a:extLst>
+              <a:ext uri="{FF2B5EF4-FFF2-40B4-BE49-F238E27FC236}">
+                <a16:creationId xmlns:a16="http://schemas.microsoft.com/office/drawing/2014/main" id="{CA0D2388-CC3C-46A4-B2F1-0C360FBCB4EE}"/>
+              </a:ext>
+            </a:extLst>
+          </p:cNvPr>
+          <p:cNvSpPr>
+            <a:spLocks noGrp="1"/>
+          </p:cNvSpPr>
+          <p:nvPr>
+            <p:ph type="title"/>
+          </p:nvPr>
+        </p:nvSpPr>
+        <p:spPr/>
+        <p:txBody>
+          <a:bodyPr/>
+          <a:lstStyle/>
+          <a:p>
+            <a:r>
+              <a:rPr lang="en-US" dirty="0"/>
+              <a:t>Conclusion</a:t>
+            </a:r>
+            <a:endParaRPr lang="en-IN" dirty="0"/>
+          </a:p>
+        </p:txBody>
+      </p:sp>
+      <p:sp>
+        <p:nvSpPr>
+          <p:cNvPr id="4" name="Rectangle 1">
+            <a:extLst>
+              <a:ext uri="{FF2B5EF4-FFF2-40B4-BE49-F238E27FC236}">
+                <a16:creationId xmlns:a16="http://schemas.microsoft.com/office/drawing/2014/main" id="{22F9ECF1-D078-42E2-BD26-7678298EF73D}"/>
+              </a:ext>
+            </a:extLst>
+          </p:cNvPr>
+          <p:cNvSpPr>
+            <a:spLocks noGrp="1" noChangeArrowheads="1"/>
+          </p:cNvSpPr>
+          <p:nvPr>
+            <p:ph idx="1"/>
+          </p:nvPr>
+        </p:nvSpPr>
+        <p:spPr bwMode="auto">
+          <a:xfrm>
+            <a:off x="772583" y="1905505"/>
+            <a:ext cx="9962091" cy="3046988"/>
+          </a:xfrm>
+          <a:prstGeom prst="rect">
+            <a:avLst/>
+          </a:prstGeom>
+          <a:noFill/>
+          <a:ln>
+            <a:noFill/>
+          </a:ln>
+          <a:effectLst/>
+          <a:extLst>
+            <a:ext uri="{909E8E84-426E-40DD-AFC4-6F175D3DCCD1}">
+              <a14:hiddenFill xmlns:a14="http://schemas.microsoft.com/office/drawing/2010/main">
+                <a:solidFill>
+                  <a:schemeClr val="accent1"/>
+                </a:solidFill>
+              </a14:hiddenFill>
+            </a:ext>
+            <a:ext uri="{91240B29-F687-4F45-9708-019B960494DF}">
+              <a14:hiddenLine xmlns:a14="http://schemas.microsoft.com/office/drawing/2010/main" w="9525">
+                <a:solidFill>
+                  <a:schemeClr val="tx1"/>
+                </a:solidFill>
+                <a:miter lim="800000"/>
+                <a:headEnd/>
+                <a:tailEnd/>
+              </a14:hiddenLine>
+            </a:ext>
+            <a:ext uri="{AF507438-7753-43E0-B8FC-AC1667EBCBE1}">
+              <a14:hiddenEffects xmlns:a14="http://schemas.microsoft.com/office/drawing/2010/main">
+                <a:effectLst>
+                  <a:outerShdw dist="35921" dir="2700000" algn="ctr" rotWithShape="0">
+                    <a:schemeClr val="bg2"/>
+                  </a:outerShdw>
+                </a:effectLst>
+              </a14:hiddenEffects>
+            </a:ext>
+          </a:extLst>
+        </p:spPr>
+        <p:txBody>
+          <a:bodyPr vert="horz" wrap="square" lIns="91440" tIns="45720" rIns="91440" bIns="45720" numCol="1" anchor="ctr" anchorCtr="0" compatLnSpc="1">
+            <a:prstTxWarp prst="textNoShape">
+              <a:avLst/>
+            </a:prstTxWarp>
+            <a:spAutoFit/>
+          </a:bodyPr>
+          <a:lstStyle/>
+          <a:p>
+            <a:pPr marL="0" marR="0" lvl="0" indent="0" algn="l" defTabSz="914400" rtl="0" eaLnBrk="0" fontAlgn="base" latinLnBrk="0" hangingPunct="0">
+              <a:lnSpc>
+                <a:spcPct val="100000"/>
+              </a:lnSpc>
+              <a:spcBef>
+                <a:spcPct val="0"/>
+              </a:spcBef>
+              <a:spcAft>
+                <a:spcPct val="0"/>
+              </a:spcAft>
+              <a:buClrTx/>
+              <a:buSzTx/>
+              <a:buFontTx/>
+              <a:buChar char="•"/>
+              <a:tabLst/>
+            </a:pPr>
+            <a:r>
+              <a:rPr kumimoji="0" lang="en-US" altLang="en-US" sz="1600" b="0" i="0" u="none" strike="noStrike" cap="none" normalizeH="0" baseline="0" dirty="0">
+                <a:ln>
+                  <a:noFill/>
+                </a:ln>
+                <a:solidFill>
+                  <a:schemeClr val="tx1"/>
+                </a:solidFill>
+                <a:effectLst/>
+                <a:latin typeface="Arial" panose="020B0604020202020204" pitchFamily="34" charset="0"/>
+              </a:rPr>
+              <a:t>Successfully tested the </a:t>
+            </a:r>
+            <a:r>
+              <a:rPr kumimoji="0" lang="en-US" altLang="en-US" sz="1600" b="1" i="0" u="none" strike="noStrike" cap="none" normalizeH="0" baseline="0" dirty="0">
+                <a:ln>
+                  <a:noFill/>
+                </a:ln>
+                <a:solidFill>
+                  <a:schemeClr val="tx1"/>
+                </a:solidFill>
+                <a:effectLst/>
+                <a:latin typeface="Arial" panose="020B0604020202020204" pitchFamily="34" charset="0"/>
+              </a:rPr>
+              <a:t>Automation Exercise E-Commerce application</a:t>
+            </a:r>
+            <a:r>
+              <a:rPr kumimoji="0" lang="en-US" altLang="en-US" sz="1600" b="0" i="0" u="none" strike="noStrike" cap="none" normalizeH="0" baseline="0" dirty="0">
+                <a:ln>
+                  <a:noFill/>
+                </a:ln>
+                <a:solidFill>
+                  <a:schemeClr val="tx1"/>
+                </a:solidFill>
+                <a:effectLst/>
+                <a:latin typeface="Arial" panose="020B0604020202020204" pitchFamily="34" charset="0"/>
+              </a:rPr>
+              <a:t> using multiple testing approaches.</a:t>
+            </a:r>
+          </a:p>
+          <a:p>
+            <a:pPr marL="0" marR="0" lvl="0" indent="0" algn="l" defTabSz="914400" rtl="0" eaLnBrk="0" fontAlgn="base" latinLnBrk="0" hangingPunct="0">
+              <a:lnSpc>
+                <a:spcPct val="100000"/>
+              </a:lnSpc>
+              <a:spcBef>
+                <a:spcPct val="0"/>
+              </a:spcBef>
+              <a:spcAft>
+                <a:spcPct val="0"/>
+              </a:spcAft>
+              <a:buClrTx/>
+              <a:buSzTx/>
+              <a:buFontTx/>
+              <a:buChar char="•"/>
+              <a:tabLst/>
+            </a:pPr>
+            <a:r>
+              <a:rPr kumimoji="0" lang="en-US" altLang="en-US" sz="1600" b="0" i="0" u="none" strike="noStrike" cap="none" normalizeH="0" baseline="0" dirty="0">
+                <a:ln>
+                  <a:noFill/>
+                </a:ln>
+                <a:solidFill>
+                  <a:schemeClr val="tx1"/>
+                </a:solidFill>
+                <a:effectLst/>
+                <a:latin typeface="Arial" panose="020B0604020202020204" pitchFamily="34" charset="0"/>
+              </a:rPr>
+              <a:t>Performed </a:t>
+            </a:r>
+            <a:r>
+              <a:rPr kumimoji="0" lang="en-US" altLang="en-US" sz="1600" b="1" i="0" u="none" strike="noStrike" cap="none" normalizeH="0" baseline="0" dirty="0">
+                <a:ln>
+                  <a:noFill/>
+                </a:ln>
+                <a:solidFill>
+                  <a:schemeClr val="tx1"/>
+                </a:solidFill>
+                <a:effectLst/>
+                <a:latin typeface="Arial" panose="020B0604020202020204" pitchFamily="34" charset="0"/>
+              </a:rPr>
+              <a:t>Manual Testing</a:t>
+            </a:r>
+            <a:r>
+              <a:rPr kumimoji="0" lang="en-US" altLang="en-US" sz="1600" b="0" i="0" u="none" strike="noStrike" cap="none" normalizeH="0" baseline="0" dirty="0">
+                <a:ln>
+                  <a:noFill/>
+                </a:ln>
+                <a:solidFill>
+                  <a:schemeClr val="tx1"/>
+                </a:solidFill>
+                <a:effectLst/>
+                <a:latin typeface="Arial" panose="020B0604020202020204" pitchFamily="34" charset="0"/>
+              </a:rPr>
+              <a:t> for major e-commerce modules.</a:t>
+            </a:r>
+          </a:p>
+          <a:p>
+            <a:pPr marL="0" marR="0" lvl="0" indent="0" algn="l" defTabSz="914400" rtl="0" eaLnBrk="0" fontAlgn="base" latinLnBrk="0" hangingPunct="0">
+              <a:lnSpc>
+                <a:spcPct val="100000"/>
+              </a:lnSpc>
+              <a:spcBef>
+                <a:spcPct val="0"/>
+              </a:spcBef>
+              <a:spcAft>
+                <a:spcPct val="0"/>
+              </a:spcAft>
+              <a:buClrTx/>
+              <a:buSzTx/>
+              <a:buFontTx/>
+              <a:buChar char="•"/>
+              <a:tabLst/>
+            </a:pPr>
+            <a:r>
+              <a:rPr kumimoji="0" lang="en-US" altLang="en-US" sz="1600" b="0" i="0" u="none" strike="noStrike" cap="none" normalizeH="0" baseline="0" dirty="0">
+                <a:ln>
+                  <a:noFill/>
+                </a:ln>
+                <a:solidFill>
+                  <a:schemeClr val="tx1"/>
+                </a:solidFill>
+                <a:effectLst/>
+                <a:latin typeface="Arial" panose="020B0604020202020204" pitchFamily="34" charset="0"/>
+              </a:rPr>
+              <a:t>Implemented </a:t>
+            </a:r>
+            <a:r>
+              <a:rPr kumimoji="0" lang="en-US" altLang="en-US" sz="1600" b="1" i="0" u="none" strike="noStrike" cap="none" normalizeH="0" baseline="0" dirty="0">
+                <a:ln>
+                  <a:noFill/>
+                </a:ln>
+                <a:solidFill>
+                  <a:schemeClr val="tx1"/>
+                </a:solidFill>
+                <a:effectLst/>
+                <a:latin typeface="Arial" panose="020B0604020202020204" pitchFamily="34" charset="0"/>
+              </a:rPr>
+              <a:t>Web Automation Testing</a:t>
+            </a:r>
+            <a:r>
+              <a:rPr kumimoji="0" lang="en-US" altLang="en-US" sz="1600" b="0" i="0" u="none" strike="noStrike" cap="none" normalizeH="0" baseline="0" dirty="0">
+                <a:ln>
+                  <a:noFill/>
+                </a:ln>
+                <a:solidFill>
+                  <a:schemeClr val="tx1"/>
+                </a:solidFill>
+                <a:effectLst/>
+                <a:latin typeface="Arial" panose="020B0604020202020204" pitchFamily="34" charset="0"/>
+              </a:rPr>
+              <a:t> using Selenium, Java, TestNG, Maven, and POM.</a:t>
+            </a:r>
+          </a:p>
+          <a:p>
+            <a:pPr marL="0" marR="0" lvl="0" indent="0" algn="l" defTabSz="914400" rtl="0" eaLnBrk="0" fontAlgn="base" latinLnBrk="0" hangingPunct="0">
+              <a:lnSpc>
+                <a:spcPct val="100000"/>
+              </a:lnSpc>
+              <a:spcBef>
+                <a:spcPct val="0"/>
+              </a:spcBef>
+              <a:spcAft>
+                <a:spcPct val="0"/>
+              </a:spcAft>
+              <a:buClrTx/>
+              <a:buSzTx/>
+              <a:buFontTx/>
+              <a:buChar char="•"/>
+              <a:tabLst/>
+            </a:pPr>
+            <a:r>
+              <a:rPr kumimoji="0" lang="en-US" altLang="en-US" sz="1600" b="0" i="0" u="none" strike="noStrike" cap="none" normalizeH="0" baseline="0" dirty="0">
+                <a:ln>
+                  <a:noFill/>
+                </a:ln>
+                <a:solidFill>
+                  <a:schemeClr val="tx1"/>
+                </a:solidFill>
+                <a:effectLst/>
+                <a:latin typeface="Arial" panose="020B0604020202020204" pitchFamily="34" charset="0"/>
+              </a:rPr>
+              <a:t>Performed </a:t>
+            </a:r>
+            <a:r>
+              <a:rPr kumimoji="0" lang="en-US" altLang="en-US" sz="1600" b="1" i="0" u="none" strike="noStrike" cap="none" normalizeH="0" baseline="0" dirty="0">
+                <a:ln>
+                  <a:noFill/>
+                </a:ln>
+                <a:solidFill>
+                  <a:schemeClr val="tx1"/>
+                </a:solidFill>
+                <a:effectLst/>
+                <a:latin typeface="Arial" panose="020B0604020202020204" pitchFamily="34" charset="0"/>
+              </a:rPr>
+              <a:t>API Testing</a:t>
+            </a:r>
+            <a:r>
+              <a:rPr kumimoji="0" lang="en-US" altLang="en-US" sz="1600" b="0" i="0" u="none" strike="noStrike" cap="none" normalizeH="0" baseline="0" dirty="0">
+                <a:ln>
+                  <a:noFill/>
+                </a:ln>
+                <a:solidFill>
+                  <a:schemeClr val="tx1"/>
+                </a:solidFill>
+                <a:effectLst/>
+                <a:latin typeface="Arial" panose="020B0604020202020204" pitchFamily="34" charset="0"/>
+              </a:rPr>
+              <a:t> using Postman and Rest Assured.</a:t>
+            </a:r>
+          </a:p>
+          <a:p>
+            <a:pPr marL="0" marR="0" lvl="0" indent="0" algn="l" defTabSz="914400" rtl="0" eaLnBrk="0" fontAlgn="base" latinLnBrk="0" hangingPunct="0">
+              <a:lnSpc>
+                <a:spcPct val="100000"/>
+              </a:lnSpc>
+              <a:spcBef>
+                <a:spcPct val="0"/>
+              </a:spcBef>
+              <a:spcAft>
+                <a:spcPct val="0"/>
+              </a:spcAft>
+              <a:buClrTx/>
+              <a:buSzTx/>
+              <a:buFontTx/>
+              <a:buChar char="•"/>
+              <a:tabLst/>
+            </a:pPr>
+            <a:r>
+              <a:rPr kumimoji="0" lang="en-US" altLang="en-US" sz="1600" b="0" i="0" u="none" strike="noStrike" cap="none" normalizeH="0" baseline="0" dirty="0">
+                <a:ln>
+                  <a:noFill/>
+                </a:ln>
+                <a:solidFill>
+                  <a:schemeClr val="tx1"/>
+                </a:solidFill>
+                <a:effectLst/>
+                <a:latin typeface="Arial" panose="020B0604020202020204" pitchFamily="34" charset="0"/>
+              </a:rPr>
+              <a:t>Used </a:t>
+            </a:r>
+            <a:r>
+              <a:rPr kumimoji="0" lang="en-US" altLang="en-US" sz="1600" b="1" i="0" u="none" strike="noStrike" cap="none" normalizeH="0" baseline="0" dirty="0">
+                <a:ln>
+                  <a:noFill/>
+                </a:ln>
+                <a:solidFill>
+                  <a:schemeClr val="tx1"/>
+                </a:solidFill>
+                <a:effectLst/>
+                <a:latin typeface="Arial" panose="020B0604020202020204" pitchFamily="34" charset="0"/>
+              </a:rPr>
+              <a:t>AI-based testing</a:t>
+            </a:r>
+            <a:r>
+              <a:rPr kumimoji="0" lang="en-US" altLang="en-US" sz="1600" b="0" i="0" u="none" strike="noStrike" cap="none" normalizeH="0" baseline="0" dirty="0">
+                <a:ln>
+                  <a:noFill/>
+                </a:ln>
+                <a:solidFill>
+                  <a:schemeClr val="tx1"/>
+                </a:solidFill>
+                <a:effectLst/>
+                <a:latin typeface="Arial" panose="020B0604020202020204" pitchFamily="34" charset="0"/>
+              </a:rPr>
+              <a:t> to support test automation and validation.</a:t>
+            </a:r>
+          </a:p>
+          <a:p>
+            <a:pPr marL="0" marR="0" lvl="0" indent="0" algn="l" defTabSz="914400" rtl="0" eaLnBrk="0" fontAlgn="base" latinLnBrk="0" hangingPunct="0">
+              <a:lnSpc>
+                <a:spcPct val="100000"/>
+              </a:lnSpc>
+              <a:spcBef>
+                <a:spcPct val="0"/>
+              </a:spcBef>
+              <a:spcAft>
+                <a:spcPct val="0"/>
+              </a:spcAft>
+              <a:buClrTx/>
+              <a:buSzTx/>
+              <a:buFontTx/>
+              <a:buChar char="•"/>
+              <a:tabLst/>
+            </a:pPr>
+            <a:r>
+              <a:rPr kumimoji="0" lang="en-US" altLang="en-US" sz="1600" b="0" i="0" u="none" strike="noStrike" cap="none" normalizeH="0" baseline="0" dirty="0">
+                <a:ln>
+                  <a:noFill/>
+                </a:ln>
+                <a:solidFill>
+                  <a:schemeClr val="tx1"/>
+                </a:solidFill>
+                <a:effectLst/>
+                <a:latin typeface="Arial" panose="020B0604020202020204" pitchFamily="34" charset="0"/>
+              </a:rPr>
+              <a:t>Integrated the automation project with </a:t>
+            </a:r>
+            <a:r>
+              <a:rPr kumimoji="0" lang="en-US" altLang="en-US" sz="1600" b="1" i="0" u="none" strike="noStrike" cap="none" normalizeH="0" baseline="0" dirty="0">
+                <a:ln>
+                  <a:noFill/>
+                </a:ln>
+                <a:solidFill>
+                  <a:schemeClr val="tx1"/>
+                </a:solidFill>
+                <a:effectLst/>
+                <a:latin typeface="Arial" panose="020B0604020202020204" pitchFamily="34" charset="0"/>
+              </a:rPr>
+              <a:t>GitHub and Jenkins</a:t>
+            </a:r>
+            <a:r>
+              <a:rPr kumimoji="0" lang="en-US" altLang="en-US" sz="1600" b="0" i="0" u="none" strike="noStrike" cap="none" normalizeH="0" baseline="0" dirty="0">
+                <a:ln>
+                  <a:noFill/>
+                </a:ln>
+                <a:solidFill>
+                  <a:schemeClr val="tx1"/>
+                </a:solidFill>
+                <a:effectLst/>
+                <a:latin typeface="Arial" panose="020B0604020202020204" pitchFamily="34" charset="0"/>
+              </a:rPr>
+              <a:t> to demonstrate CI/CD execution.</a:t>
+            </a:r>
+          </a:p>
+          <a:p>
+            <a:pPr marL="0" marR="0" lvl="0" indent="0" algn="l" defTabSz="914400" rtl="0" eaLnBrk="0" fontAlgn="base" latinLnBrk="0" hangingPunct="0">
+              <a:lnSpc>
+                <a:spcPct val="100000"/>
+              </a:lnSpc>
+              <a:spcBef>
+                <a:spcPct val="0"/>
+              </a:spcBef>
+              <a:spcAft>
+                <a:spcPct val="0"/>
+              </a:spcAft>
+              <a:buClrTx/>
+              <a:buSzTx/>
+              <a:buFontTx/>
+              <a:buChar char="•"/>
+              <a:tabLst/>
+            </a:pPr>
+            <a:r>
+              <a:rPr kumimoji="0" lang="en-US" altLang="en-US" sz="1600" b="0" i="0" u="none" strike="noStrike" cap="none" normalizeH="0" baseline="0" dirty="0">
+                <a:ln>
+                  <a:noFill/>
+                </a:ln>
+                <a:solidFill>
+                  <a:schemeClr val="tx1"/>
+                </a:solidFill>
+                <a:effectLst/>
+                <a:latin typeface="Arial" panose="020B0604020202020204" pitchFamily="34" charset="0"/>
+              </a:rPr>
+              <a:t>Generated and reviewed </a:t>
+            </a:r>
+            <a:r>
+              <a:rPr kumimoji="0" lang="en-US" altLang="en-US" sz="1600" b="1" i="0" u="none" strike="noStrike" cap="none" normalizeH="0" baseline="0" dirty="0">
+                <a:ln>
+                  <a:noFill/>
+                </a:ln>
+                <a:solidFill>
+                  <a:schemeClr val="tx1"/>
+                </a:solidFill>
+                <a:effectLst/>
+                <a:latin typeface="Arial" panose="020B0604020202020204" pitchFamily="34" charset="0"/>
+              </a:rPr>
+              <a:t>test results and reports</a:t>
+            </a:r>
+            <a:r>
+              <a:rPr kumimoji="0" lang="en-US" altLang="en-US" sz="1600" b="0" i="0" u="none" strike="noStrike" cap="none" normalizeH="0" baseline="0" dirty="0">
+                <a:ln>
+                  <a:noFill/>
+                </a:ln>
+                <a:solidFill>
+                  <a:schemeClr val="tx1"/>
+                </a:solidFill>
+                <a:effectLst/>
+                <a:latin typeface="Arial" panose="020B0604020202020204" pitchFamily="34" charset="0"/>
+              </a:rPr>
+              <a:t> to evaluate application quality.</a:t>
+            </a:r>
+          </a:p>
+          <a:p>
+            <a:pPr marL="0" marR="0" lvl="0" indent="0" algn="l" defTabSz="914400" rtl="0" eaLnBrk="0" fontAlgn="base" latinLnBrk="0" hangingPunct="0">
+              <a:lnSpc>
+                <a:spcPct val="100000"/>
+              </a:lnSpc>
+              <a:spcBef>
+                <a:spcPct val="0"/>
+              </a:spcBef>
+              <a:spcAft>
+                <a:spcPct val="0"/>
+              </a:spcAft>
+              <a:buClrTx/>
+              <a:buSzTx/>
+              <a:buFontTx/>
+              <a:buChar char="•"/>
+              <a:tabLst/>
+            </a:pPr>
+            <a:r>
+              <a:rPr kumimoji="0" lang="en-US" altLang="en-US" sz="1600" b="0" i="0" u="none" strike="noStrike" cap="none" normalizeH="0" baseline="0" dirty="0">
+                <a:ln>
+                  <a:noFill/>
+                </a:ln>
+                <a:solidFill>
+                  <a:schemeClr val="tx1"/>
+                </a:solidFill>
+                <a:effectLst/>
+                <a:latin typeface="Arial" panose="020B0604020202020204" pitchFamily="34" charset="0"/>
+              </a:rPr>
+              <a:t>This project provided practical experience in </a:t>
+            </a:r>
+            <a:r>
+              <a:rPr kumimoji="0" lang="en-US" altLang="en-US" sz="1600" b="1" i="0" u="none" strike="noStrike" cap="none" normalizeH="0" baseline="0" dirty="0">
+                <a:ln>
+                  <a:noFill/>
+                </a:ln>
+                <a:solidFill>
+                  <a:schemeClr val="tx1"/>
+                </a:solidFill>
+                <a:effectLst/>
+                <a:latin typeface="Arial" panose="020B0604020202020204" pitchFamily="34" charset="0"/>
+              </a:rPr>
+              <a:t>Manual Testing, Automation Testing, API Testing, AI Testing, and CI/CD</a:t>
+            </a:r>
+            <a:r>
+              <a:rPr kumimoji="0" lang="en-US" altLang="en-US" sz="1600" b="0" i="0" u="none" strike="noStrike" cap="none" normalizeH="0" baseline="0" dirty="0">
+                <a:ln>
+                  <a:noFill/>
+                </a:ln>
+                <a:solidFill>
+                  <a:schemeClr val="tx1"/>
+                </a:solidFill>
+                <a:effectLst/>
+                <a:latin typeface="Arial" panose="020B0604020202020204" pitchFamily="34" charset="0"/>
+              </a:rPr>
+              <a:t>.</a:t>
+            </a:r>
+          </a:p>
+          <a:p>
+            <a:pPr marL="0" marR="0" lvl="0" indent="0" algn="l" defTabSz="914400" rtl="0" eaLnBrk="0" fontAlgn="base" latinLnBrk="0" hangingPunct="0">
+              <a:lnSpc>
+                <a:spcPct val="100000"/>
+              </a:lnSpc>
+              <a:spcBef>
+                <a:spcPct val="0"/>
+              </a:spcBef>
+              <a:spcAft>
+                <a:spcPct val="0"/>
+              </a:spcAft>
+              <a:buClrTx/>
+              <a:buSzTx/>
+              <a:buFontTx/>
+              <a:buNone/>
+              <a:tabLst/>
+            </a:pPr>
+            <a:r>
+              <a:rPr kumimoji="0" lang="en-US" altLang="en-US" sz="1600" b="1" i="0" u="none" strike="noStrike" cap="none" normalizeH="0" baseline="0" dirty="0">
+                <a:ln>
+                  <a:noFill/>
+                </a:ln>
+                <a:solidFill>
+                  <a:schemeClr val="tx1"/>
+                </a:solidFill>
+                <a:effectLst/>
+                <a:latin typeface="Arial" panose="020B0604020202020204" pitchFamily="34" charset="0"/>
+              </a:rPr>
+              <a:t>Overall, the project helped me understand the complete software testing process and gain hands-on experience with industry-relevant testing tools and techniques.</a:t>
+            </a:r>
+            <a:endParaRPr kumimoji="0" lang="en-US" altLang="en-US" sz="1600" b="0" i="0" u="none" strike="noStrike" cap="none" normalizeH="0" baseline="0" dirty="0">
+              <a:ln>
+                <a:noFill/>
+              </a:ln>
+              <a:solidFill>
+                <a:schemeClr val="tx1"/>
+              </a:solidFill>
+              <a:effectLst/>
+              <a:latin typeface="Arial" panose="020B0604020202020204" pitchFamily="34" charset="0"/>
+            </a:endParaRPr>
           </a:p>
         </p:txBody>
       </p:sp>
     </p:spTree>
     <p:extLst>
       <p:ext uri="{BB962C8B-B14F-4D97-AF65-F5344CB8AC3E}">
-        <p14:creationId xmlns:p14="http://schemas.microsoft.com/office/powerpoint/2010/main" val="1715800418"/>
+        <p14:creationId xmlns:p14="http://schemas.microsoft.com/office/powerpoint/2010/main" val="1205350421"/>
       </p:ext>
     </p:extLst>
   </p:cSld>
@@ -13212,6 +14787,255 @@
     <p:extLst>
       <p:ext uri="{BB962C8B-B14F-4D97-AF65-F5344CB8AC3E}">
         <p14:creationId xmlns:p14="http://schemas.microsoft.com/office/powerpoint/2010/main" val="991652204"/>
+      </p:ext>
+    </p:extLst>
+  </p:cSld>
+  <p:clrMapOvr>
+    <a:masterClrMapping/>
+  </p:clrMapOvr>
+</p:sld>
+</file>
+
+<file path=ppt/slides/slide30.xml><?xml version="1.0" encoding="utf-8"?>
+<p:sld xmlns:a="http://schemas.openxmlformats.org/drawingml/2006/main" xmlns:r="http://schemas.openxmlformats.org/officeDocument/2006/relationships" xmlns:p="http://schemas.openxmlformats.org/presentationml/2006/main">
+  <p:cSld>
+    <p:spTree>
+      <p:nvGrpSpPr>
+        <p:cNvPr id="1" name=""/>
+        <p:cNvGrpSpPr/>
+        <p:nvPr/>
+      </p:nvGrpSpPr>
+      <p:grpSpPr>
+        <a:xfrm>
+          <a:off x="0" y="0"/>
+          <a:ext cx="0" cy="0"/>
+          <a:chOff x="0" y="0"/>
+          <a:chExt cx="0" cy="0"/>
+        </a:xfrm>
+      </p:grpSpPr>
+      <p:sp>
+        <p:nvSpPr>
+          <p:cNvPr id="3" name="Rectangle 1">
+            <a:extLst>
+              <a:ext uri="{FF2B5EF4-FFF2-40B4-BE49-F238E27FC236}">
+                <a16:creationId xmlns:a16="http://schemas.microsoft.com/office/drawing/2014/main" id="{510745D9-6D11-48AB-9076-51CDD9300BD6}"/>
+              </a:ext>
+            </a:extLst>
+          </p:cNvPr>
+          <p:cNvSpPr>
+            <a:spLocks noGrp="1" noChangeArrowheads="1"/>
+          </p:cNvSpPr>
+          <p:nvPr>
+            <p:ph type="title"/>
+          </p:nvPr>
+        </p:nvSpPr>
+        <p:spPr bwMode="auto">
+          <a:xfrm>
+            <a:off x="753534" y="1038991"/>
+            <a:ext cx="9285816" cy="2862322"/>
+          </a:xfrm>
+          <a:prstGeom prst="rect">
+            <a:avLst/>
+          </a:prstGeom>
+          <a:noFill/>
+          <a:ln>
+            <a:noFill/>
+          </a:ln>
+          <a:effectLst/>
+          <a:extLst>
+            <a:ext uri="{909E8E84-426E-40DD-AFC4-6F175D3DCCD1}">
+              <a14:hiddenFill xmlns:a14="http://schemas.microsoft.com/office/drawing/2010/main">
+                <a:solidFill>
+                  <a:schemeClr val="accent1"/>
+                </a:solidFill>
+              </a14:hiddenFill>
+            </a:ext>
+            <a:ext uri="{91240B29-F687-4F45-9708-019B960494DF}">
+              <a14:hiddenLine xmlns:a14="http://schemas.microsoft.com/office/drawing/2010/main" w="9525">
+                <a:solidFill>
+                  <a:schemeClr val="tx1"/>
+                </a:solidFill>
+                <a:miter lim="800000"/>
+                <a:headEnd/>
+                <a:tailEnd/>
+              </a14:hiddenLine>
+            </a:ext>
+            <a:ext uri="{AF507438-7753-43E0-B8FC-AC1667EBCBE1}">
+              <a14:hiddenEffects xmlns:a14="http://schemas.microsoft.com/office/drawing/2010/main">
+                <a:effectLst>
+                  <a:outerShdw dist="35921" dir="2700000" algn="ctr" rotWithShape="0">
+                    <a:schemeClr val="bg2"/>
+                  </a:outerShdw>
+                </a:effectLst>
+              </a14:hiddenEffects>
+            </a:ext>
+          </a:extLst>
+        </p:spPr>
+        <p:txBody>
+          <a:bodyPr vert="horz" wrap="square" lIns="91440" tIns="45720" rIns="91440" bIns="45720" numCol="1" anchor="ctr" anchorCtr="0" compatLnSpc="1">
+            <a:prstTxWarp prst="textNoShape">
+              <a:avLst/>
+            </a:prstTxWarp>
+            <a:spAutoFit/>
+          </a:bodyPr>
+          <a:lstStyle/>
+          <a:p>
+            <a:pPr marL="0" marR="0" lvl="0" indent="0" algn="l" defTabSz="914400" rtl="0" eaLnBrk="0" fontAlgn="base" latinLnBrk="0" hangingPunct="0">
+              <a:lnSpc>
+                <a:spcPct val="100000"/>
+              </a:lnSpc>
+              <a:spcBef>
+                <a:spcPct val="0"/>
+              </a:spcBef>
+              <a:spcAft>
+                <a:spcPct val="0"/>
+              </a:spcAft>
+              <a:buClrTx/>
+              <a:buSzTx/>
+              <a:buFontTx/>
+              <a:buNone/>
+              <a:tabLst/>
+            </a:pPr>
+            <a:r>
+              <a:rPr kumimoji="0" lang="en-US" altLang="en-US" sz="4000" b="1" i="0" u="none" strike="noStrike" cap="none" normalizeH="0" baseline="0" dirty="0">
+                <a:ln>
+                  <a:noFill/>
+                </a:ln>
+                <a:solidFill>
+                  <a:schemeClr val="accent2"/>
+                </a:solidFill>
+                <a:effectLst/>
+                <a:latin typeface="Arial" panose="020B0604020202020204" pitchFamily="34" charset="0"/>
+              </a:rPr>
+              <a:t>THANK YOU</a:t>
+            </a:r>
+          </a:p>
+          <a:p>
+            <a:pPr marL="0" marR="0" lvl="0" indent="0" algn="l" defTabSz="914400" rtl="0" eaLnBrk="0" fontAlgn="base" latinLnBrk="0" hangingPunct="0">
+              <a:lnSpc>
+                <a:spcPct val="100000"/>
+              </a:lnSpc>
+              <a:spcBef>
+                <a:spcPct val="0"/>
+              </a:spcBef>
+              <a:spcAft>
+                <a:spcPct val="0"/>
+              </a:spcAft>
+              <a:buClrTx/>
+              <a:buSzTx/>
+              <a:buFontTx/>
+              <a:buNone/>
+              <a:tabLst/>
+            </a:pPr>
+            <a:endParaRPr kumimoji="0" lang="en-US" altLang="en-US" sz="2800" b="1" i="0" u="none" strike="noStrike" cap="none" normalizeH="0" baseline="0" dirty="0">
+              <a:ln>
+                <a:noFill/>
+              </a:ln>
+              <a:solidFill>
+                <a:schemeClr val="tx1"/>
+              </a:solidFill>
+              <a:effectLst/>
+              <a:latin typeface="Arial" panose="020B0604020202020204" pitchFamily="34" charset="0"/>
+            </a:endParaRPr>
+          </a:p>
+          <a:p>
+            <a:pPr marL="0" marR="0" lvl="0" indent="0" algn="l" defTabSz="914400" rtl="0" eaLnBrk="0" fontAlgn="base" latinLnBrk="0" hangingPunct="0">
+              <a:lnSpc>
+                <a:spcPct val="100000"/>
+              </a:lnSpc>
+              <a:spcBef>
+                <a:spcPct val="0"/>
+              </a:spcBef>
+              <a:spcAft>
+                <a:spcPct val="0"/>
+              </a:spcAft>
+              <a:buClrTx/>
+              <a:buSzTx/>
+              <a:buFontTx/>
+              <a:buNone/>
+              <a:tabLst/>
+            </a:pPr>
+            <a:r>
+              <a:rPr kumimoji="0" lang="en-US" altLang="en-US" sz="2800" b="1" i="0" u="none" strike="noStrike" cap="none" normalizeH="0" baseline="0" dirty="0">
+                <a:ln>
+                  <a:noFill/>
+                </a:ln>
+                <a:solidFill>
+                  <a:schemeClr val="tx1"/>
+                </a:solidFill>
+                <a:effectLst/>
+                <a:latin typeface="Arial" panose="020B0604020202020204" pitchFamily="34" charset="0"/>
+              </a:rPr>
+              <a:t>Questions &amp; Answers</a:t>
+            </a:r>
+          </a:p>
+          <a:p>
+            <a:pPr marL="0" marR="0" lvl="0" indent="0" algn="l" defTabSz="914400" rtl="0" eaLnBrk="0" fontAlgn="base" latinLnBrk="0" hangingPunct="0">
+              <a:lnSpc>
+                <a:spcPct val="100000"/>
+              </a:lnSpc>
+              <a:spcBef>
+                <a:spcPct val="0"/>
+              </a:spcBef>
+              <a:spcAft>
+                <a:spcPct val="0"/>
+              </a:spcAft>
+              <a:buClrTx/>
+              <a:buSzTx/>
+              <a:buFontTx/>
+              <a:buNone/>
+              <a:tabLst/>
+            </a:pPr>
+            <a:r>
+              <a:rPr kumimoji="0" lang="en-US" altLang="en-US" sz="2800" b="1" i="0" u="none" strike="noStrike" cap="none" normalizeH="0" baseline="0" dirty="0">
+                <a:ln>
+                  <a:noFill/>
+                </a:ln>
+                <a:solidFill>
+                  <a:schemeClr val="tx1"/>
+                </a:solidFill>
+                <a:effectLst/>
+                <a:latin typeface="Arial" panose="020B0604020202020204" pitchFamily="34" charset="0"/>
+              </a:rPr>
+              <a:t>E-Commerce Application Testing Project</a:t>
+            </a:r>
+            <a:endParaRPr kumimoji="0" lang="en-US" altLang="en-US" sz="2800" b="0" i="0" u="none" strike="noStrike" cap="none" normalizeH="0" baseline="0" dirty="0">
+              <a:ln>
+                <a:noFill/>
+              </a:ln>
+              <a:solidFill>
+                <a:schemeClr val="tx1"/>
+              </a:solidFill>
+              <a:effectLst/>
+              <a:latin typeface="Arial" panose="020B0604020202020204" pitchFamily="34" charset="0"/>
+            </a:endParaRPr>
+          </a:p>
+          <a:p>
+            <a:pPr lvl="0" defTabSz="914400" eaLnBrk="0" fontAlgn="base" hangingPunct="0">
+              <a:spcAft>
+                <a:spcPct val="0"/>
+              </a:spcAft>
+            </a:pPr>
+            <a:r>
+              <a:rPr kumimoji="0" lang="en-US" altLang="en-US" sz="2800" b="0" i="0" u="none" strike="noStrike" cap="none" normalizeH="0" baseline="0" dirty="0">
+                <a:ln>
+                  <a:noFill/>
+                </a:ln>
+                <a:solidFill>
+                  <a:schemeClr val="tx1"/>
+                </a:solidFill>
+                <a:effectLst/>
+                <a:latin typeface="Arial" panose="020B0604020202020204" pitchFamily="34" charset="0"/>
+              </a:rPr>
+              <a:t>Manual Testing | Selenium Automation | API Testing | AI Testing| GitHub| CI/CD Pipelines</a:t>
+            </a:r>
+          </a:p>
+        </p:txBody>
+      </p:sp>
+    </p:spTree>
+    <p:extLst>
+      <p:ext uri="{BB962C8B-B14F-4D97-AF65-F5344CB8AC3E}">
+        <p14:creationId xmlns:p14="http://schemas.microsoft.com/office/powerpoint/2010/main" val="1715800418"/>
       </p:ext>
     </p:extLst>
   </p:cSld>
